--- a/docs/example2_walkthrough.pptx
+++ b/docs/example2_walkthrough.pptx
@@ -5,10 +5,10 @@
     <p:sldMasterId id="2147483648" r:id="rId1"/>
   </p:sldMasterIdLst>
   <p:sldIdLst>
-    <p:sldId id="256" r:id="rId2"/>
-    <p:sldId id="257" r:id="rId3"/>
-    <p:sldId id="258" r:id="rId4"/>
-    <p:sldId id="259" r:id="rId5"/>
+    <p:sldId id="256" r:id="rId7"/>
+    <p:sldId id="257" r:id="rId8"/>
+    <p:sldId id="258" r:id="rId9"/>
+    <p:sldId id="259" r:id="rId10"/>
   </p:sldIdLst>
   <p:sldSz cx="9144000" cy="6858000" type="screen4x3"/>
   <p:notesSz cx="6858000" cy="9144000"/>
@@ -107,22 +107,6 @@
       </a:defRPr>
     </a:lvl9pPr>
   </p:defaultTextStyle>
-  <p:extLst>
-    <p:ext uri="{EFAFB233-063F-42B5-8137-9DF3F51BA10A}">
-      <p15:sldGuideLst xmlns:p15="http://schemas.microsoft.com/office/powerpoint/2012/main">
-        <p15:guide id="1" orient="horz" pos="2160">
-          <p15:clr>
-            <a:srgbClr val="A4A3A4"/>
-          </p15:clr>
-        </p15:guide>
-        <p15:guide id="2" pos="2880">
-          <p15:clr>
-            <a:srgbClr val="A4A3A4"/>
-          </p15:clr>
-        </p15:guide>
-      </p15:sldGuideLst>
-    </p:ext>
-  </p:extLst>
 </p:presentation>
 </file>
 
@@ -164,9 +148,10 @@
           <a:lstStyle/>
           <a:p>
             <a:r>
-              <a:rPr lang="en-US"/>
+              <a:rPr lang="en-US" smtClean="0"/>
               <a:t>Click to edit Master title style</a:t>
             </a:r>
+            <a:endParaRPr lang="en-US"/>
           </a:p>
         </p:txBody>
       </p:sp>
@@ -282,9 +267,10 @@
           </a:lstStyle>
           <a:p>
             <a:r>
-              <a:rPr lang="en-US"/>
+              <a:rPr lang="en-US" smtClean="0"/>
               <a:t>Click to edit Master subtitle style</a:t>
             </a:r>
+            <a:endParaRPr lang="en-US"/>
           </a:p>
         </p:txBody>
       </p:sp>
@@ -305,7 +291,7 @@
           <a:p>
             <a:fld id="{5BCAD085-E8A6-8845-BD4E-CB4CCA059FC4}" type="datetimeFigureOut">
               <a:rPr lang="en-US" smtClean="0"/>
-              <a:t>5/9/2026</a:t>
+              <a:t>1/27/13</a:t>
             </a:fld>
             <a:endParaRPr lang="en-US"/>
           </a:p>
@@ -399,9 +385,10 @@
           <a:lstStyle/>
           <a:p>
             <a:r>
-              <a:rPr lang="en-US"/>
+              <a:rPr lang="en-US" smtClean="0"/>
               <a:t>Click to edit Master title style</a:t>
             </a:r>
+            <a:endParaRPr lang="en-US"/>
           </a:p>
         </p:txBody>
       </p:sp>
@@ -422,37 +409,38 @@
           <a:p>
             <a:pPr lvl="0"/>
             <a:r>
-              <a:rPr lang="en-US"/>
+              <a:rPr lang="en-US" smtClean="0"/>
               <a:t>Click to edit Master text styles</a:t>
             </a:r>
           </a:p>
           <a:p>
             <a:pPr lvl="1"/>
             <a:r>
-              <a:rPr lang="en-US"/>
+              <a:rPr lang="en-US" smtClean="0"/>
               <a:t>Second level</a:t>
             </a:r>
           </a:p>
           <a:p>
             <a:pPr lvl="2"/>
             <a:r>
-              <a:rPr lang="en-US"/>
+              <a:rPr lang="en-US" smtClean="0"/>
               <a:t>Third level</a:t>
             </a:r>
           </a:p>
           <a:p>
             <a:pPr lvl="3"/>
             <a:r>
-              <a:rPr lang="en-US"/>
+              <a:rPr lang="en-US" smtClean="0"/>
               <a:t>Fourth level</a:t>
             </a:r>
           </a:p>
           <a:p>
             <a:pPr lvl="4"/>
             <a:r>
-              <a:rPr lang="en-US"/>
+              <a:rPr lang="en-US" smtClean="0"/>
               <a:t>Fifth level</a:t>
             </a:r>
+            <a:endParaRPr lang="en-US"/>
           </a:p>
         </p:txBody>
       </p:sp>
@@ -473,7 +461,7 @@
           <a:p>
             <a:fld id="{5BCAD085-E8A6-8845-BD4E-CB4CCA059FC4}" type="datetimeFigureOut">
               <a:rPr lang="en-US" smtClean="0"/>
-              <a:t>5/9/2026</a:t>
+              <a:t>1/27/13</a:t>
             </a:fld>
             <a:endParaRPr lang="en-US"/>
           </a:p>
@@ -572,9 +560,10 @@
           <a:lstStyle/>
           <a:p>
             <a:r>
-              <a:rPr lang="en-US"/>
+              <a:rPr lang="en-US" smtClean="0"/>
               <a:t>Click to edit Master title style</a:t>
             </a:r>
+            <a:endParaRPr lang="en-US"/>
           </a:p>
         </p:txBody>
       </p:sp>
@@ -600,37 +589,38 @@
           <a:p>
             <a:pPr lvl="0"/>
             <a:r>
-              <a:rPr lang="en-US"/>
+              <a:rPr lang="en-US" smtClean="0"/>
               <a:t>Click to edit Master text styles</a:t>
             </a:r>
           </a:p>
           <a:p>
             <a:pPr lvl="1"/>
             <a:r>
-              <a:rPr lang="en-US"/>
+              <a:rPr lang="en-US" smtClean="0"/>
               <a:t>Second level</a:t>
             </a:r>
           </a:p>
           <a:p>
             <a:pPr lvl="2"/>
             <a:r>
-              <a:rPr lang="en-US"/>
+              <a:rPr lang="en-US" smtClean="0"/>
               <a:t>Third level</a:t>
             </a:r>
           </a:p>
           <a:p>
             <a:pPr lvl="3"/>
             <a:r>
-              <a:rPr lang="en-US"/>
+              <a:rPr lang="en-US" smtClean="0"/>
               <a:t>Fourth level</a:t>
             </a:r>
           </a:p>
           <a:p>
             <a:pPr lvl="4"/>
             <a:r>
-              <a:rPr lang="en-US"/>
+              <a:rPr lang="en-US" smtClean="0"/>
               <a:t>Fifth level</a:t>
             </a:r>
+            <a:endParaRPr lang="en-US"/>
           </a:p>
         </p:txBody>
       </p:sp>
@@ -651,7 +641,7 @@
           <a:p>
             <a:fld id="{5BCAD085-E8A6-8845-BD4E-CB4CCA059FC4}" type="datetimeFigureOut">
               <a:rPr lang="en-US" smtClean="0"/>
-              <a:t>5/9/2026</a:t>
+              <a:t>1/27/13</a:t>
             </a:fld>
             <a:endParaRPr lang="en-US"/>
           </a:p>
@@ -745,9 +735,10 @@
           <a:lstStyle/>
           <a:p>
             <a:r>
-              <a:rPr lang="en-US"/>
+              <a:rPr lang="en-US" smtClean="0"/>
               <a:t>Click to edit Master title style</a:t>
             </a:r>
+            <a:endParaRPr lang="en-US"/>
           </a:p>
         </p:txBody>
       </p:sp>
@@ -768,37 +759,38 @@
           <a:p>
             <a:pPr lvl="0"/>
             <a:r>
-              <a:rPr lang="en-US"/>
+              <a:rPr lang="en-US" smtClean="0"/>
               <a:t>Click to edit Master text styles</a:t>
             </a:r>
           </a:p>
           <a:p>
             <a:pPr lvl="1"/>
             <a:r>
-              <a:rPr lang="en-US"/>
+              <a:rPr lang="en-US" smtClean="0"/>
               <a:t>Second level</a:t>
             </a:r>
           </a:p>
           <a:p>
             <a:pPr lvl="2"/>
             <a:r>
-              <a:rPr lang="en-US"/>
+              <a:rPr lang="en-US" smtClean="0"/>
               <a:t>Third level</a:t>
             </a:r>
           </a:p>
           <a:p>
             <a:pPr lvl="3"/>
             <a:r>
-              <a:rPr lang="en-US"/>
+              <a:rPr lang="en-US" smtClean="0"/>
               <a:t>Fourth level</a:t>
             </a:r>
           </a:p>
           <a:p>
             <a:pPr lvl="4"/>
             <a:r>
-              <a:rPr lang="en-US"/>
+              <a:rPr lang="en-US" smtClean="0"/>
               <a:t>Fifth level</a:t>
             </a:r>
+            <a:endParaRPr lang="en-US"/>
           </a:p>
         </p:txBody>
       </p:sp>
@@ -819,7 +811,7 @@
           <a:p>
             <a:fld id="{5BCAD085-E8A6-8845-BD4E-CB4CCA059FC4}" type="datetimeFigureOut">
               <a:rPr lang="en-US" smtClean="0"/>
-              <a:t>5/9/2026</a:t>
+              <a:t>1/27/13</a:t>
             </a:fld>
             <a:endParaRPr lang="en-US"/>
           </a:p>
@@ -922,9 +914,10 @@
           </a:lstStyle>
           <a:p>
             <a:r>
-              <a:rPr lang="en-US"/>
+              <a:rPr lang="en-US" smtClean="0"/>
               <a:t>Click to edit Master title style</a:t>
             </a:r>
+            <a:endParaRPr lang="en-US"/>
           </a:p>
         </p:txBody>
       </p:sp>
@@ -1041,7 +1034,7 @@
           <a:p>
             <a:pPr lvl="0"/>
             <a:r>
-              <a:rPr lang="en-US"/>
+              <a:rPr lang="en-US" smtClean="0"/>
               <a:t>Click to edit Master text styles</a:t>
             </a:r>
           </a:p>
@@ -1064,7 +1057,7 @@
           <a:p>
             <a:fld id="{5BCAD085-E8A6-8845-BD4E-CB4CCA059FC4}" type="datetimeFigureOut">
               <a:rPr lang="en-US" smtClean="0"/>
-              <a:t>5/9/2026</a:t>
+              <a:t>1/27/13</a:t>
             </a:fld>
             <a:endParaRPr lang="en-US"/>
           </a:p>
@@ -1158,9 +1151,10 @@
           <a:lstStyle/>
           <a:p>
             <a:r>
-              <a:rPr lang="en-US"/>
+              <a:rPr lang="en-US" smtClean="0"/>
               <a:t>Click to edit Master title style</a:t>
             </a:r>
+            <a:endParaRPr lang="en-US"/>
           </a:p>
         </p:txBody>
       </p:sp>
@@ -1214,37 +1208,38 @@
           <a:p>
             <a:pPr lvl="0"/>
             <a:r>
-              <a:rPr lang="en-US"/>
+              <a:rPr lang="en-US" smtClean="0"/>
               <a:t>Click to edit Master text styles</a:t>
             </a:r>
           </a:p>
           <a:p>
             <a:pPr lvl="1"/>
             <a:r>
-              <a:rPr lang="en-US"/>
+              <a:rPr lang="en-US" smtClean="0"/>
               <a:t>Second level</a:t>
             </a:r>
           </a:p>
           <a:p>
             <a:pPr lvl="2"/>
             <a:r>
-              <a:rPr lang="en-US"/>
+              <a:rPr lang="en-US" smtClean="0"/>
               <a:t>Third level</a:t>
             </a:r>
           </a:p>
           <a:p>
             <a:pPr lvl="3"/>
             <a:r>
-              <a:rPr lang="en-US"/>
+              <a:rPr lang="en-US" smtClean="0"/>
               <a:t>Fourth level</a:t>
             </a:r>
           </a:p>
           <a:p>
             <a:pPr lvl="4"/>
             <a:r>
-              <a:rPr lang="en-US"/>
+              <a:rPr lang="en-US" smtClean="0"/>
               <a:t>Fifth level</a:t>
             </a:r>
+            <a:endParaRPr lang="en-US"/>
           </a:p>
         </p:txBody>
       </p:sp>
@@ -1298,37 +1293,38 @@
           <a:p>
             <a:pPr lvl="0"/>
             <a:r>
-              <a:rPr lang="en-US"/>
+              <a:rPr lang="en-US" smtClean="0"/>
               <a:t>Click to edit Master text styles</a:t>
             </a:r>
           </a:p>
           <a:p>
             <a:pPr lvl="1"/>
             <a:r>
-              <a:rPr lang="en-US"/>
+              <a:rPr lang="en-US" smtClean="0"/>
               <a:t>Second level</a:t>
             </a:r>
           </a:p>
           <a:p>
             <a:pPr lvl="2"/>
             <a:r>
-              <a:rPr lang="en-US"/>
+              <a:rPr lang="en-US" smtClean="0"/>
               <a:t>Third level</a:t>
             </a:r>
           </a:p>
           <a:p>
             <a:pPr lvl="3"/>
             <a:r>
-              <a:rPr lang="en-US"/>
+              <a:rPr lang="en-US" smtClean="0"/>
               <a:t>Fourth level</a:t>
             </a:r>
           </a:p>
           <a:p>
             <a:pPr lvl="4"/>
             <a:r>
-              <a:rPr lang="en-US"/>
+              <a:rPr lang="en-US" smtClean="0"/>
               <a:t>Fifth level</a:t>
             </a:r>
+            <a:endParaRPr lang="en-US"/>
           </a:p>
         </p:txBody>
       </p:sp>
@@ -1349,7 +1345,7 @@
           <a:p>
             <a:fld id="{5BCAD085-E8A6-8845-BD4E-CB4CCA059FC4}" type="datetimeFigureOut">
               <a:rPr lang="en-US" smtClean="0"/>
-              <a:t>5/9/2026</a:t>
+              <a:t>1/27/13</a:t>
             </a:fld>
             <a:endParaRPr lang="en-US"/>
           </a:p>
@@ -1447,9 +1443,10 @@
           </a:lstStyle>
           <a:p>
             <a:r>
-              <a:rPr lang="en-US"/>
+              <a:rPr lang="en-US" smtClean="0"/>
               <a:t>Click to edit Master title style</a:t>
             </a:r>
+            <a:endParaRPr lang="en-US"/>
           </a:p>
         </p:txBody>
       </p:sp>
@@ -1512,7 +1509,7 @@
           <a:p>
             <a:pPr lvl="0"/>
             <a:r>
-              <a:rPr lang="en-US"/>
+              <a:rPr lang="en-US" smtClean="0"/>
               <a:t>Click to edit Master text styles</a:t>
             </a:r>
           </a:p>
@@ -1568,37 +1565,38 @@
           <a:p>
             <a:pPr lvl="0"/>
             <a:r>
-              <a:rPr lang="en-US"/>
+              <a:rPr lang="en-US" smtClean="0"/>
               <a:t>Click to edit Master text styles</a:t>
             </a:r>
           </a:p>
           <a:p>
             <a:pPr lvl="1"/>
             <a:r>
-              <a:rPr lang="en-US"/>
+              <a:rPr lang="en-US" smtClean="0"/>
               <a:t>Second level</a:t>
             </a:r>
           </a:p>
           <a:p>
             <a:pPr lvl="2"/>
             <a:r>
-              <a:rPr lang="en-US"/>
+              <a:rPr lang="en-US" smtClean="0"/>
               <a:t>Third level</a:t>
             </a:r>
           </a:p>
           <a:p>
             <a:pPr lvl="3"/>
             <a:r>
-              <a:rPr lang="en-US"/>
+              <a:rPr lang="en-US" smtClean="0"/>
               <a:t>Fourth level</a:t>
             </a:r>
           </a:p>
           <a:p>
             <a:pPr lvl="4"/>
             <a:r>
-              <a:rPr lang="en-US"/>
+              <a:rPr lang="en-US" smtClean="0"/>
               <a:t>Fifth level</a:t>
             </a:r>
+            <a:endParaRPr lang="en-US"/>
           </a:p>
         </p:txBody>
       </p:sp>
@@ -1661,7 +1659,7 @@
           <a:p>
             <a:pPr lvl="0"/>
             <a:r>
-              <a:rPr lang="en-US"/>
+              <a:rPr lang="en-US" smtClean="0"/>
               <a:t>Click to edit Master text styles</a:t>
             </a:r>
           </a:p>
@@ -1717,37 +1715,38 @@
           <a:p>
             <a:pPr lvl="0"/>
             <a:r>
-              <a:rPr lang="en-US"/>
+              <a:rPr lang="en-US" smtClean="0"/>
               <a:t>Click to edit Master text styles</a:t>
             </a:r>
           </a:p>
           <a:p>
             <a:pPr lvl="1"/>
             <a:r>
-              <a:rPr lang="en-US"/>
+              <a:rPr lang="en-US" smtClean="0"/>
               <a:t>Second level</a:t>
             </a:r>
           </a:p>
           <a:p>
             <a:pPr lvl="2"/>
             <a:r>
-              <a:rPr lang="en-US"/>
+              <a:rPr lang="en-US" smtClean="0"/>
               <a:t>Third level</a:t>
             </a:r>
           </a:p>
           <a:p>
             <a:pPr lvl="3"/>
             <a:r>
-              <a:rPr lang="en-US"/>
+              <a:rPr lang="en-US" smtClean="0"/>
               <a:t>Fourth level</a:t>
             </a:r>
           </a:p>
           <a:p>
             <a:pPr lvl="4"/>
             <a:r>
-              <a:rPr lang="en-US"/>
+              <a:rPr lang="en-US" smtClean="0"/>
               <a:t>Fifth level</a:t>
             </a:r>
+            <a:endParaRPr lang="en-US"/>
           </a:p>
         </p:txBody>
       </p:sp>
@@ -1768,7 +1767,7 @@
           <a:p>
             <a:fld id="{5BCAD085-E8A6-8845-BD4E-CB4CCA059FC4}" type="datetimeFigureOut">
               <a:rPr lang="en-US" smtClean="0"/>
-              <a:t>5/9/2026</a:t>
+              <a:t>1/27/13</a:t>
             </a:fld>
             <a:endParaRPr lang="en-US"/>
           </a:p>
@@ -1862,9 +1861,10 @@
           <a:lstStyle/>
           <a:p>
             <a:r>
-              <a:rPr lang="en-US"/>
+              <a:rPr lang="en-US" smtClean="0"/>
               <a:t>Click to edit Master title style</a:t>
             </a:r>
+            <a:endParaRPr lang="en-US"/>
           </a:p>
         </p:txBody>
       </p:sp>
@@ -1885,7 +1885,7 @@
           <a:p>
             <a:fld id="{5BCAD085-E8A6-8845-BD4E-CB4CCA059FC4}" type="datetimeFigureOut">
               <a:rPr lang="en-US" smtClean="0"/>
-              <a:t>5/9/2026</a:t>
+              <a:t>1/27/13</a:t>
             </a:fld>
             <a:endParaRPr lang="en-US"/>
           </a:p>
@@ -1980,7 +1980,7 @@
           <a:p>
             <a:fld id="{5BCAD085-E8A6-8845-BD4E-CB4CCA059FC4}" type="datetimeFigureOut">
               <a:rPr lang="en-US" smtClean="0"/>
-              <a:t>5/9/2026</a:t>
+              <a:t>1/27/13</a:t>
             </a:fld>
             <a:endParaRPr lang="en-US"/>
           </a:p>
@@ -2083,9 +2083,10 @@
           </a:lstStyle>
           <a:p>
             <a:r>
-              <a:rPr lang="en-US"/>
+              <a:rPr lang="en-US" smtClean="0"/>
               <a:t>Click to edit Master title style</a:t>
             </a:r>
+            <a:endParaRPr lang="en-US"/>
           </a:p>
         </p:txBody>
       </p:sp>
@@ -2139,37 +2140,38 @@
           <a:p>
             <a:pPr lvl="0"/>
             <a:r>
-              <a:rPr lang="en-US"/>
+              <a:rPr lang="en-US" smtClean="0"/>
               <a:t>Click to edit Master text styles</a:t>
             </a:r>
           </a:p>
           <a:p>
             <a:pPr lvl="1"/>
             <a:r>
-              <a:rPr lang="en-US"/>
+              <a:rPr lang="en-US" smtClean="0"/>
               <a:t>Second level</a:t>
             </a:r>
           </a:p>
           <a:p>
             <a:pPr lvl="2"/>
             <a:r>
-              <a:rPr lang="en-US"/>
+              <a:rPr lang="en-US" smtClean="0"/>
               <a:t>Third level</a:t>
             </a:r>
           </a:p>
           <a:p>
             <a:pPr lvl="3"/>
             <a:r>
-              <a:rPr lang="en-US"/>
+              <a:rPr lang="en-US" smtClean="0"/>
               <a:t>Fourth level</a:t>
             </a:r>
           </a:p>
           <a:p>
             <a:pPr lvl="4"/>
             <a:r>
-              <a:rPr lang="en-US"/>
+              <a:rPr lang="en-US" smtClean="0"/>
               <a:t>Fifth level</a:t>
             </a:r>
+            <a:endParaRPr lang="en-US"/>
           </a:p>
         </p:txBody>
       </p:sp>
@@ -2232,7 +2234,7 @@
           <a:p>
             <a:pPr lvl="0"/>
             <a:r>
-              <a:rPr lang="en-US"/>
+              <a:rPr lang="en-US" smtClean="0"/>
               <a:t>Click to edit Master text styles</a:t>
             </a:r>
           </a:p>
@@ -2255,7 +2257,7 @@
           <a:p>
             <a:fld id="{5BCAD085-E8A6-8845-BD4E-CB4CCA059FC4}" type="datetimeFigureOut">
               <a:rPr lang="en-US" smtClean="0"/>
-              <a:t>5/9/2026</a:t>
+              <a:t>1/27/13</a:t>
             </a:fld>
             <a:endParaRPr lang="en-US"/>
           </a:p>
@@ -2358,9 +2360,10 @@
           </a:lstStyle>
           <a:p>
             <a:r>
-              <a:rPr lang="en-US"/>
+              <a:rPr lang="en-US" smtClean="0"/>
               <a:t>Click to edit Master title style</a:t>
             </a:r>
+            <a:endParaRPr lang="en-US"/>
           </a:p>
         </p:txBody>
       </p:sp>
@@ -2484,7 +2487,7 @@
           <a:p>
             <a:pPr lvl="0"/>
             <a:r>
-              <a:rPr lang="en-US"/>
+              <a:rPr lang="en-US" smtClean="0"/>
               <a:t>Click to edit Master text styles</a:t>
             </a:r>
           </a:p>
@@ -2507,7 +2510,7 @@
           <a:p>
             <a:fld id="{5BCAD085-E8A6-8845-BD4E-CB4CCA059FC4}" type="datetimeFigureOut">
               <a:rPr lang="en-US" smtClean="0"/>
-              <a:t>5/9/2026</a:t>
+              <a:t>1/27/13</a:t>
             </a:fld>
             <a:endParaRPr lang="en-US"/>
           </a:p>
@@ -2616,9 +2619,10 @@
           <a:lstStyle/>
           <a:p>
             <a:r>
-              <a:rPr lang="en-US"/>
+              <a:rPr lang="en-US" smtClean="0"/>
               <a:t>Click to edit Master title style</a:t>
             </a:r>
+            <a:endParaRPr lang="en-US"/>
           </a:p>
         </p:txBody>
       </p:sp>
@@ -2649,37 +2653,38 @@
           <a:p>
             <a:pPr lvl="0"/>
             <a:r>
-              <a:rPr lang="en-US"/>
+              <a:rPr lang="en-US" smtClean="0"/>
               <a:t>Click to edit Master text styles</a:t>
             </a:r>
           </a:p>
           <a:p>
             <a:pPr lvl="1"/>
             <a:r>
-              <a:rPr lang="en-US"/>
+              <a:rPr lang="en-US" smtClean="0"/>
               <a:t>Second level</a:t>
             </a:r>
           </a:p>
           <a:p>
             <a:pPr lvl="2"/>
             <a:r>
-              <a:rPr lang="en-US"/>
+              <a:rPr lang="en-US" smtClean="0"/>
               <a:t>Third level</a:t>
             </a:r>
           </a:p>
           <a:p>
             <a:pPr lvl="3"/>
             <a:r>
-              <a:rPr lang="en-US"/>
+              <a:rPr lang="en-US" smtClean="0"/>
               <a:t>Fourth level</a:t>
             </a:r>
           </a:p>
           <a:p>
             <a:pPr lvl="4"/>
             <a:r>
-              <a:rPr lang="en-US"/>
+              <a:rPr lang="en-US" smtClean="0"/>
               <a:t>Fifth level</a:t>
             </a:r>
+            <a:endParaRPr lang="en-US"/>
           </a:p>
         </p:txBody>
       </p:sp>
@@ -2718,7 +2723,7 @@
           <a:p>
             <a:fld id="{5BCAD085-E8A6-8845-BD4E-CB4CCA059FC4}" type="datetimeFigureOut">
               <a:rPr lang="en-US" smtClean="0"/>
-              <a:t>5/9/2026</a:t>
+              <a:t>1/27/13</a:t>
             </a:fld>
             <a:endParaRPr lang="en-US"/>
           </a:p>
@@ -3077,7 +3082,7 @@
 </file>
 
 <file path=ppt/slides/slide1.xml><?xml version="1.0" encoding="utf-8"?>
-<p:sld xmlns:a="http://schemas.openxmlformats.org/drawingml/2006/main" xmlns:r="http://schemas.openxmlformats.org/officeDocument/2006/relationships" xmlns:p="http://schemas.openxmlformats.org/presentationml/2006/main">
+<p:sld xmlns:a="http://schemas.openxmlformats.org/drawingml/2006/main" xmlns:p="http://schemas.openxmlformats.org/presentationml/2006/main" xmlns:r="http://schemas.openxmlformats.org/officeDocument/2006/relationships">
   <p:cSld>
     <p:spTree>
       <p:nvGrpSpPr>
@@ -3085,14 +3090,7 @@
         <p:cNvGrpSpPr/>
         <p:nvPr/>
       </p:nvGrpSpPr>
-      <p:grpSpPr>
-        <a:xfrm>
-          <a:off x="0" y="0"/>
-          <a:ext cx="0" cy="0"/>
-          <a:chOff x="0" y="0"/>
-          <a:chExt cx="0" cy="0"/>
-        </a:xfrm>
-      </p:grpSpPr>
+      <p:grpSpPr/>
       <p:sp>
         <p:nvSpPr>
           <p:cNvPr id="2" name="Rectangle 1"/>
@@ -3133,7 +3131,6 @@
           <a:lstStyle/>
           <a:p>
             <a:pPr algn="ctr"/>
-            <a:endParaRPr/>
           </a:p>
         </p:txBody>
       </p:sp>
@@ -3145,8 +3142,8 @@
         </p:nvSpPr>
         <p:spPr>
           <a:xfrm>
-            <a:off x="7909560" y="0"/>
-            <a:ext cx="1234440" cy="6858000"/>
+            <a:off x="7543800" y="0"/>
+            <a:ext cx="1600200" cy="6858000"/>
           </a:xfrm>
           <a:prstGeom prst="rect">
             <a:avLst/>
@@ -3179,7 +3176,6 @@
           <a:lstStyle/>
           <a:p>
             <a:pPr algn="ctr"/>
-            <a:endParaRPr/>
           </a:p>
         </p:txBody>
       </p:sp>
@@ -3191,8 +3187,8 @@
         </p:nvSpPr>
         <p:spPr>
           <a:xfrm rot="16200000">
-            <a:off x="8001000" y="274320"/>
-            <a:ext cx="1051560" cy="6309360"/>
+            <a:off x="7616952" y="274320"/>
+            <a:ext cx="1453896" cy="6309360"/>
           </a:xfrm>
           <a:prstGeom prst="rect">
             <a:avLst/>
@@ -3200,13 +3196,13 @@
           <a:noFill/>
         </p:spPr>
         <p:txBody>
-          <a:bodyPr wrap="none" anchor="ctr">
+          <a:bodyPr wrap="square" anchor="ctr">
             <a:spAutoFit/>
           </a:bodyPr>
           <a:lstStyle/>
           <a:p>
             <a:pPr>
-              <a:defRPr sz="2800">
+              <a:defRPr sz="2600">
                 <a:solidFill>
                   <a:srgbClr val="141414"/>
                 </a:solidFill>
@@ -3228,7 +3224,7 @@
         <p:spPr>
           <a:xfrm>
             <a:off x="731520" y="502920"/>
-            <a:ext cx="6812280" cy="1051560"/>
+            <a:ext cx="6446520" cy="1051560"/>
           </a:xfrm>
           <a:prstGeom prst="rect">
             <a:avLst/>
@@ -3269,8 +3265,8 @@
         </p:blipFill>
         <p:spPr>
           <a:xfrm>
-            <a:off x="904875" y="950166"/>
-            <a:ext cx="5385215" cy="5587794"/>
+            <a:off x="1436588" y="1691640"/>
+            <a:ext cx="4670622" cy="4846320"/>
           </a:xfrm>
           <a:prstGeom prst="rect">
             <a:avLst/>
@@ -3286,7 +3282,7 @@
 </file>
 
 <file path=ppt/slides/slide2.xml><?xml version="1.0" encoding="utf-8"?>
-<p:sld xmlns:a="http://schemas.openxmlformats.org/drawingml/2006/main" xmlns:r="http://schemas.openxmlformats.org/officeDocument/2006/relationships" xmlns:p="http://schemas.openxmlformats.org/presentationml/2006/main">
+<p:sld xmlns:a="http://schemas.openxmlformats.org/drawingml/2006/main" xmlns:p="http://schemas.openxmlformats.org/presentationml/2006/main" xmlns:r="http://schemas.openxmlformats.org/officeDocument/2006/relationships">
   <p:cSld>
     <p:spTree>
       <p:nvGrpSpPr>
@@ -3294,14 +3290,7 @@
         <p:cNvGrpSpPr/>
         <p:nvPr/>
       </p:nvGrpSpPr>
-      <p:grpSpPr>
-        <a:xfrm>
-          <a:off x="0" y="0"/>
-          <a:ext cx="0" cy="0"/>
-          <a:chOff x="0" y="0"/>
-          <a:chExt cx="0" cy="0"/>
-        </a:xfrm>
-      </p:grpSpPr>
+      <p:grpSpPr/>
       <p:sp>
         <p:nvSpPr>
           <p:cNvPr id="2" name="Rectangle 1"/>
@@ -3342,7 +3331,6 @@
           <a:lstStyle/>
           <a:p>
             <a:pPr algn="ctr"/>
-            <a:endParaRPr/>
           </a:p>
         </p:txBody>
       </p:sp>
@@ -3363,8 +3351,8 @@
           <a:noFill/>
         </p:spPr>
         <p:txBody>
-          <a:bodyPr wrap="none">
-            <a:spAutoFit/>
+          <a:bodyPr wrap="square">
+            <a:noAutofit/>
           </a:bodyPr>
           <a:lstStyle/>
           <a:p>
@@ -3382,7 +3370,7 @@
             <a:r>
               <a:rPr sz="1600">
                 <a:solidFill>
-                  <a:srgbClr val="C586C0"/>
+                  <a:srgbClr val="C792EA"/>
                 </a:solidFill>
                 <a:latin typeface="Consolas"/>
               </a:rPr>
@@ -3391,11 +3379,47 @@
             <a:r>
               <a:rPr sz="1600">
                 <a:solidFill>
-                  <a:srgbClr val="DCDCDC"/>
-                </a:solidFill>
-                <a:latin typeface="Consolas"/>
-              </a:rPr>
-              <a:t> std::thread;</a:t>
+                  <a:srgbClr val="EEFFFF"/>
+                </a:solidFill>
+                <a:latin typeface="Consolas"/>
+              </a:rPr>
+              <a:t> </a:t>
+            </a:r>
+            <a:r>
+              <a:rPr sz="1600">
+                <a:solidFill>
+                  <a:srgbClr val="EEFFFF"/>
+                </a:solidFill>
+                <a:latin typeface="Consolas"/>
+              </a:rPr>
+              <a:t>std</a:t>
+            </a:r>
+            <a:r>
+              <a:rPr sz="1600">
+                <a:solidFill>
+                  <a:srgbClr val="BAC2DE"/>
+                </a:solidFill>
+                <a:latin typeface="Consolas"/>
+              </a:rPr>
+              <a:t>::</a:t>
+            </a:r>
+            <a:r>
+              <a:rPr sz="1600">
+                <a:solidFill>
+                  <a:srgbClr val="EEFFFF"/>
+                </a:solidFill>
+                <a:latin typeface="Consolas"/>
+              </a:rPr>
+              <a:t>thread</a:t>
+            </a:r>
+            <a:r>
+              <a:rPr sz="1600">
+                <a:solidFill>
+                  <a:srgbClr val="BAC2DE"/>
+                </a:solidFill>
+                <a:latin typeface="Consolas"/>
+              </a:rPr>
+              <a:t>;</a:t>
             </a:r>
           </a:p>
           <a:p>
@@ -3413,7 +3437,7 @@
             <a:r>
               <a:rPr sz="1600">
                 <a:solidFill>
-                  <a:srgbClr val="C586C0"/>
+                  <a:srgbClr val="C792EA"/>
                 </a:solidFill>
                 <a:latin typeface="Consolas"/>
               </a:rPr>
@@ -3422,11 +3446,65 @@
             <a:r>
               <a:rPr sz="1600">
                 <a:solidFill>
-                  <a:srgbClr val="DCDCDC"/>
-                </a:solidFill>
-                <a:latin typeface="Consolas"/>
-              </a:rPr>
-              <a:t> std::time::Duration;</a:t>
+                  <a:srgbClr val="EEFFFF"/>
+                </a:solidFill>
+                <a:latin typeface="Consolas"/>
+              </a:rPr>
+              <a:t> </a:t>
+            </a:r>
+            <a:r>
+              <a:rPr sz="1600">
+                <a:solidFill>
+                  <a:srgbClr val="EEFFFF"/>
+                </a:solidFill>
+                <a:latin typeface="Consolas"/>
+              </a:rPr>
+              <a:t>std</a:t>
+            </a:r>
+            <a:r>
+              <a:rPr sz="1600">
+                <a:solidFill>
+                  <a:srgbClr val="BAC2DE"/>
+                </a:solidFill>
+                <a:latin typeface="Consolas"/>
+              </a:rPr>
+              <a:t>::</a:t>
+            </a:r>
+            <a:r>
+              <a:rPr sz="1600">
+                <a:solidFill>
+                  <a:srgbClr val="EEFFFF"/>
+                </a:solidFill>
+                <a:latin typeface="Consolas"/>
+              </a:rPr>
+              <a:t>time</a:t>
+            </a:r>
+            <a:r>
+              <a:rPr sz="1600">
+                <a:solidFill>
+                  <a:srgbClr val="BAC2DE"/>
+                </a:solidFill>
+                <a:latin typeface="Consolas"/>
+              </a:rPr>
+              <a:t>::</a:t>
+            </a:r>
+            <a:r>
+              <a:rPr sz="1600">
+                <a:solidFill>
+                  <a:srgbClr val="EEFFFF"/>
+                </a:solidFill>
+                <a:latin typeface="Consolas"/>
+              </a:rPr>
+              <a:t>Duration</a:t>
+            </a:r>
+            <a:r>
+              <a:rPr sz="1600">
+                <a:solidFill>
+                  <a:srgbClr val="BAC2DE"/>
+                </a:solidFill>
+                <a:latin typeface="Consolas"/>
+              </a:rPr>
+              <a:t>;</a:t>
             </a:r>
           </a:p>
           <a:p>
@@ -3441,12 +3519,6 @@
                 <a:spcPts val="0"/>
               </a:spcAft>
             </a:pPr>
-            <a:endParaRPr sz="1600">
-              <a:solidFill>
-                <a:srgbClr val="DCDCDC"/>
-              </a:solidFill>
-              <a:latin typeface="Consolas"/>
-            </a:endParaRPr>
           </a:p>
           <a:p>
             <a:pPr>
@@ -3485,7 +3557,7 @@
             <a:r>
               <a:rPr sz="1600">
                 <a:solidFill>
-                  <a:srgbClr val="C586C0"/>
+                  <a:srgbClr val="C792EA"/>
                 </a:solidFill>
                 <a:latin typeface="Consolas"/>
               </a:rPr>
@@ -3494,11 +3566,38 @@
             <a:r>
               <a:rPr sz="1600">
                 <a:solidFill>
-                  <a:srgbClr val="DCDCDC"/>
-                </a:solidFill>
-                <a:latin typeface="Consolas"/>
-              </a:rPr>
-              <a:t> Servo {</a:t>
+                  <a:srgbClr val="EEFFFF"/>
+                </a:solidFill>
+                <a:latin typeface="Consolas"/>
+              </a:rPr>
+              <a:t> </a:t>
+            </a:r>
+            <a:r>
+              <a:rPr sz="1600">
+                <a:solidFill>
+                  <a:srgbClr val="EEFFFF"/>
+                </a:solidFill>
+                <a:latin typeface="Consolas"/>
+              </a:rPr>
+              <a:t>Servo</a:t>
+            </a:r>
+            <a:r>
+              <a:rPr sz="1600">
+                <a:solidFill>
+                  <a:srgbClr val="EEFFFF"/>
+                </a:solidFill>
+                <a:latin typeface="Consolas"/>
+              </a:rPr>
+              <a:t> </a:t>
+            </a:r>
+            <a:r>
+              <a:rPr sz="1600">
+                <a:solidFill>
+                  <a:srgbClr val="BAC2DE"/>
+                </a:solidFill>
+                <a:latin typeface="Consolas"/>
+              </a:rPr>
+              <a:t>{</a:t>
             </a:r>
           </a:p>
           <a:p>
@@ -3516,7 +3615,7 @@
             <a:r>
               <a:rPr sz="1600">
                 <a:solidFill>
-                  <a:srgbClr val="DCDCDC"/>
+                  <a:srgbClr val="EEFFFF"/>
                 </a:solidFill>
                 <a:latin typeface="Consolas"/>
               </a:rPr>
@@ -3525,7 +3624,7 @@
             <a:r>
               <a:rPr sz="1600">
                 <a:solidFill>
-                  <a:srgbClr val="C586C0"/>
+                  <a:srgbClr val="C792EA"/>
                 </a:solidFill>
                 <a:latin typeface="Consolas"/>
               </a:rPr>
@@ -3534,7 +3633,7 @@
             <a:r>
               <a:rPr sz="1600">
                 <a:solidFill>
-                  <a:srgbClr val="DCDCDC"/>
+                  <a:srgbClr val="EEFFFF"/>
                 </a:solidFill>
                 <a:latin typeface="Consolas"/>
               </a:rPr>
@@ -3543,7 +3642,7 @@
             <a:r>
               <a:rPr sz="1600">
                 <a:solidFill>
-                  <a:srgbClr val="DCDCAA"/>
+                  <a:srgbClr val="82AAFF"/>
                 </a:solidFill>
                 <a:latin typeface="Consolas"/>
               </a:rPr>
@@ -3552,16 +3651,25 @@
             <a:r>
               <a:rPr sz="1600">
                 <a:solidFill>
-                  <a:srgbClr val="DCDCDC"/>
-                </a:solidFill>
-                <a:latin typeface="Consolas"/>
-              </a:rPr>
-              <a:t>(&amp;</a:t>
-            </a:r>
-            <a:r>
-              <a:rPr sz="1600">
-                <a:solidFill>
-                  <a:srgbClr val="4EC9B0"/>
+                  <a:srgbClr val="BAC2DE"/>
+                </a:solidFill>
+                <a:latin typeface="Consolas"/>
+              </a:rPr>
+              <a:t>(</a:t>
+            </a:r>
+            <a:r>
+              <a:rPr sz="1600">
+                <a:solidFill>
+                  <a:srgbClr val="89DDFF"/>
+                </a:solidFill>
+                <a:latin typeface="Consolas"/>
+              </a:rPr>
+              <a:t>&amp;</a:t>
+            </a:r>
+            <a:r>
+              <a:rPr sz="1600">
+                <a:solidFill>
+                  <a:srgbClr val="89DDFF"/>
                 </a:solidFill>
                 <a:latin typeface="Consolas"/>
               </a:rPr>
@@ -3570,16 +3678,52 @@
             <a:r>
               <a:rPr sz="1600">
                 <a:solidFill>
-                  <a:srgbClr val="DCDCDC"/>
-                </a:solidFill>
-                <a:latin typeface="Consolas"/>
-              </a:rPr>
-              <a:t>, degrees: </a:t>
-            </a:r>
-            <a:r>
-              <a:rPr sz="1600">
-                <a:solidFill>
-                  <a:srgbClr val="C586C0"/>
+                  <a:srgbClr val="BAC2DE"/>
+                </a:solidFill>
+                <a:latin typeface="Consolas"/>
+              </a:rPr>
+              <a:t>,</a:t>
+            </a:r>
+            <a:r>
+              <a:rPr sz="1600">
+                <a:solidFill>
+                  <a:srgbClr val="EEFFFF"/>
+                </a:solidFill>
+                <a:latin typeface="Consolas"/>
+              </a:rPr>
+              <a:t> </a:t>
+            </a:r>
+            <a:r>
+              <a:rPr sz="1600">
+                <a:solidFill>
+                  <a:srgbClr val="EEFFFF"/>
+                </a:solidFill>
+                <a:latin typeface="Consolas"/>
+              </a:rPr>
+              <a:t>degrees</a:t>
+            </a:r>
+            <a:r>
+              <a:rPr sz="1600">
+                <a:solidFill>
+                  <a:srgbClr val="BAC2DE"/>
+                </a:solidFill>
+                <a:latin typeface="Consolas"/>
+              </a:rPr>
+              <a:t>:</a:t>
+            </a:r>
+            <a:r>
+              <a:rPr sz="1600">
+                <a:solidFill>
+                  <a:srgbClr val="EEFFFF"/>
+                </a:solidFill>
+                <a:latin typeface="Consolas"/>
+              </a:rPr>
+              <a:t> </a:t>
+            </a:r>
+            <a:r>
+              <a:rPr sz="1600">
+                <a:solidFill>
+                  <a:srgbClr val="C792EA"/>
                 </a:solidFill>
                 <a:latin typeface="Consolas"/>
               </a:rPr>
@@ -3588,11 +3732,20 @@
             <a:r>
               <a:rPr sz="1600">
                 <a:solidFill>
-                  <a:srgbClr val="DCDCDC"/>
-                </a:solidFill>
-                <a:latin typeface="Consolas"/>
-              </a:rPr>
-              <a:t>);</a:t>
+                  <a:srgbClr val="BAC2DE"/>
+                </a:solidFill>
+                <a:latin typeface="Consolas"/>
+              </a:rPr>
+              <a:t>)</a:t>
+            </a:r>
+            <a:r>
+              <a:rPr sz="1600">
+                <a:solidFill>
+                  <a:srgbClr val="BAC2DE"/>
+                </a:solidFill>
+                <a:latin typeface="Consolas"/>
+              </a:rPr>
+              <a:t>;</a:t>
             </a:r>
           </a:p>
           <a:p>
@@ -3610,7 +3763,7 @@
             <a:r>
               <a:rPr sz="1600">
                 <a:solidFill>
-                  <a:srgbClr val="DCDCDC"/>
+                  <a:srgbClr val="BAC2DE"/>
                 </a:solidFill>
                 <a:latin typeface="Consolas"/>
               </a:rPr>
@@ -3629,12 +3782,6 @@
                 <a:spcPts val="0"/>
               </a:spcAft>
             </a:pPr>
-            <a:endParaRPr sz="1600">
-              <a:solidFill>
-                <a:srgbClr val="DCDCDC"/>
-              </a:solidFill>
-              <a:latin typeface="Consolas"/>
-            </a:endParaRPr>
           </a:p>
           <a:p>
             <a:pPr>
@@ -3695,38 +3842,11 @@
             <a:r>
               <a:rPr sz="1600">
                 <a:solidFill>
-                  <a:srgbClr val="C586C0"/>
-                </a:solidFill>
-                <a:latin typeface="Consolas"/>
-              </a:rPr>
-              <a:t>trait</a:t>
-            </a:r>
-            <a:r>
-              <a:rPr sz="1600">
-                <a:solidFill>
-                  <a:srgbClr val="DCDCDC"/>
-                </a:solidFill>
-                <a:latin typeface="Consolas"/>
-              </a:rPr>
-              <a:t> ServoPlayer: </a:t>
-            </a:r>
-            <a:r>
-              <a:rPr sz="1600">
-                <a:solidFill>
-                  <a:srgbClr val="4EC9B0"/>
-                </a:solidFill>
-                <a:latin typeface="Consolas"/>
-              </a:rPr>
-              <a:t>Servo</a:t>
-            </a:r>
-            <a:r>
-              <a:rPr sz="1600">
-                <a:solidFill>
-                  <a:srgbClr val="DCDCDC"/>
-                </a:solidFill>
-                <a:latin typeface="Consolas"/>
-              </a:rPr>
-              <a:t> {</a:t>
+                  <a:srgbClr val="6A9955"/>
+                </a:solidFill>
+                <a:latin typeface="Consolas"/>
+              </a:rPr>
+              <a:t>// TECHNIQUE NAME: Supertrait Default Methods.</a:t>
             </a:r>
           </a:p>
           <a:p>
@@ -3744,20 +3864,11 @@
             <a:r>
               <a:rPr sz="1600">
                 <a:solidFill>
-                  <a:srgbClr val="DCDCDC"/>
-                </a:solidFill>
-                <a:latin typeface="Consolas"/>
-              </a:rPr>
-              <a:t>    </a:t>
-            </a:r>
-            <a:r>
-              <a:rPr sz="1600">
-                <a:solidFill>
                   <a:srgbClr val="6A9955"/>
                 </a:solidFill>
                 <a:latin typeface="Consolas"/>
               </a:rPr>
-              <a:t>// (degrees, milliseconds to hold at that angle)</a:t>
+              <a:t>// (This example shows supertrait-based interface extension.)</a:t>
             </a:r>
           </a:p>
           <a:p>
@@ -3775,25 +3886,16 @@
             <a:r>
               <a:rPr sz="1600">
                 <a:solidFill>
-                  <a:srgbClr val="DCDCDC"/>
-                </a:solidFill>
-                <a:latin typeface="Consolas"/>
-              </a:rPr>
-              <a:t>    </a:t>
-            </a:r>
-            <a:r>
-              <a:rPr sz="1600">
-                <a:solidFill>
-                  <a:srgbClr val="C586C0"/>
-                </a:solidFill>
-                <a:latin typeface="Consolas"/>
-              </a:rPr>
-              <a:t>fn</a:t>
-            </a:r>
-            <a:r>
-              <a:rPr sz="1600">
-                <a:solidFill>
-                  <a:srgbClr val="DCDCDC"/>
+                  <a:srgbClr val="C792EA"/>
+                </a:solidFill>
+                <a:latin typeface="Consolas"/>
+              </a:rPr>
+              <a:t>trait</a:t>
+            </a:r>
+            <a:r>
+              <a:rPr sz="1600">
+                <a:solidFill>
+                  <a:srgbClr val="EEFFFF"/>
                 </a:solidFill>
                 <a:latin typeface="Consolas"/>
               </a:rPr>
@@ -3802,92 +3904,56 @@
             <a:r>
               <a:rPr sz="1600">
                 <a:solidFill>
-                  <a:srgbClr val="DCDCAA"/>
-                </a:solidFill>
-                <a:latin typeface="Consolas"/>
-              </a:rPr>
-              <a:t>animate</a:t>
-            </a:r>
-            <a:r>
-              <a:rPr sz="1600">
-                <a:solidFill>
-                  <a:srgbClr val="DCDCDC"/>
-                </a:solidFill>
-                <a:latin typeface="Consolas"/>
-              </a:rPr>
-              <a:t>(&amp;</a:t>
-            </a:r>
-            <a:r>
-              <a:rPr sz="1600">
-                <a:solidFill>
-                  <a:srgbClr val="4EC9B0"/>
-                </a:solidFill>
-                <a:latin typeface="Consolas"/>
-              </a:rPr>
-              <a:t>self</a:t>
-            </a:r>
-            <a:r>
-              <a:rPr sz="1600">
-                <a:solidFill>
-                  <a:srgbClr val="DCDCDC"/>
-                </a:solidFill>
-                <a:latin typeface="Consolas"/>
-              </a:rPr>
-              <a:t>, steps: </a:t>
-            </a:r>
-            <a:r>
-              <a:rPr sz="1600">
-                <a:solidFill>
-                  <a:srgbClr val="C586C0"/>
-                </a:solidFill>
-                <a:latin typeface="Consolas"/>
-              </a:rPr>
-              <a:t>&amp;</a:t>
-            </a:r>
-            <a:r>
-              <a:rPr sz="1600">
-                <a:solidFill>
-                  <a:srgbClr val="DCDCDC"/>
-                </a:solidFill>
-                <a:latin typeface="Consolas"/>
-              </a:rPr>
-              <a:t>[(</a:t>
-            </a:r>
-            <a:r>
-              <a:rPr sz="1600">
-                <a:solidFill>
-                  <a:srgbClr val="C586C0"/>
-                </a:solidFill>
-                <a:latin typeface="Consolas"/>
-              </a:rPr>
-              <a:t>u16</a:t>
-            </a:r>
-            <a:r>
-              <a:rPr sz="1600">
-                <a:solidFill>
-                  <a:srgbClr val="DCDCDC"/>
-                </a:solidFill>
-                <a:latin typeface="Consolas"/>
-              </a:rPr>
-              <a:t>, </a:t>
-            </a:r>
-            <a:r>
-              <a:rPr sz="1600">
-                <a:solidFill>
-                  <a:srgbClr val="C586C0"/>
-                </a:solidFill>
-                <a:latin typeface="Consolas"/>
-              </a:rPr>
-              <a:t>u64</a:t>
-            </a:r>
-            <a:r>
-              <a:rPr sz="1600">
-                <a:solidFill>
-                  <a:srgbClr val="DCDCDC"/>
-                </a:solidFill>
-                <a:latin typeface="Consolas"/>
-              </a:rPr>
-              <a:t>)]);</a:t>
+                  <a:srgbClr val="EEFFFF"/>
+                </a:solidFill>
+                <a:latin typeface="Consolas"/>
+              </a:rPr>
+              <a:t>ServoPlayer</a:t>
+            </a:r>
+            <a:r>
+              <a:rPr sz="1600">
+                <a:solidFill>
+                  <a:srgbClr val="BAC2DE"/>
+                </a:solidFill>
+                <a:latin typeface="Consolas"/>
+              </a:rPr>
+              <a:t>:</a:t>
+            </a:r>
+            <a:r>
+              <a:rPr sz="1600">
+                <a:solidFill>
+                  <a:srgbClr val="EEFFFF"/>
+                </a:solidFill>
+                <a:latin typeface="Consolas"/>
+              </a:rPr>
+              <a:t> </a:t>
+            </a:r>
+            <a:r>
+              <a:rPr sz="1600">
+                <a:solidFill>
+                  <a:srgbClr val="FFCB6B"/>
+                </a:solidFill>
+                <a:latin typeface="Consolas"/>
+              </a:rPr>
+              <a:t>Servo</a:t>
+            </a:r>
+            <a:r>
+              <a:rPr sz="1600">
+                <a:solidFill>
+                  <a:srgbClr val="EEFFFF"/>
+                </a:solidFill>
+                <a:latin typeface="Consolas"/>
+              </a:rPr>
+              <a:t> </a:t>
+            </a:r>
+            <a:r>
+              <a:rPr sz="1600">
+                <a:solidFill>
+                  <a:srgbClr val="BAC2DE"/>
+                </a:solidFill>
+                <a:latin typeface="Consolas"/>
+              </a:rPr>
+              <a:t>{</a:t>
             </a:r>
           </a:p>
           <a:p>
@@ -3905,11 +3971,20 @@
             <a:r>
               <a:rPr sz="1600">
                 <a:solidFill>
-                  <a:srgbClr val="DCDCDC"/>
-                </a:solidFill>
-                <a:latin typeface="Consolas"/>
-              </a:rPr>
-              <a:t>}</a:t>
+                  <a:srgbClr val="EEFFFF"/>
+                </a:solidFill>
+                <a:latin typeface="Consolas"/>
+              </a:rPr>
+              <a:t>    </a:t>
+            </a:r>
+            <a:r>
+              <a:rPr sz="1600">
+                <a:solidFill>
+                  <a:srgbClr val="6A9955"/>
+                </a:solidFill>
+                <a:latin typeface="Consolas"/>
+              </a:rPr>
+              <a:t>// (degrees, milliseconds to hold at that angle)</a:t>
             </a:r>
           </a:p>
           <a:p>
@@ -3924,12 +3999,213 @@
                 <a:spcPts val="0"/>
               </a:spcAft>
             </a:pPr>
-            <a:endParaRPr sz="1600">
-              <a:solidFill>
-                <a:srgbClr val="DCDCDC"/>
-              </a:solidFill>
-              <a:latin typeface="Consolas"/>
-            </a:endParaRPr>
+            <a:r>
+              <a:rPr sz="1600">
+                <a:solidFill>
+                  <a:srgbClr val="EEFFFF"/>
+                </a:solidFill>
+                <a:latin typeface="Consolas"/>
+              </a:rPr>
+              <a:t>    </a:t>
+            </a:r>
+            <a:r>
+              <a:rPr sz="1600">
+                <a:solidFill>
+                  <a:srgbClr val="C792EA"/>
+                </a:solidFill>
+                <a:latin typeface="Consolas"/>
+              </a:rPr>
+              <a:t>fn</a:t>
+            </a:r>
+            <a:r>
+              <a:rPr sz="1600">
+                <a:solidFill>
+                  <a:srgbClr val="EEFFFF"/>
+                </a:solidFill>
+                <a:latin typeface="Consolas"/>
+              </a:rPr>
+              <a:t> </a:t>
+            </a:r>
+            <a:r>
+              <a:rPr sz="1600">
+                <a:solidFill>
+                  <a:srgbClr val="82AAFF"/>
+                </a:solidFill>
+                <a:latin typeface="Consolas"/>
+              </a:rPr>
+              <a:t>animate</a:t>
+            </a:r>
+            <a:r>
+              <a:rPr sz="1600">
+                <a:solidFill>
+                  <a:srgbClr val="BAC2DE"/>
+                </a:solidFill>
+                <a:latin typeface="Consolas"/>
+              </a:rPr>
+              <a:t>(</a:t>
+            </a:r>
+            <a:r>
+              <a:rPr sz="1600">
+                <a:solidFill>
+                  <a:srgbClr val="89DDFF"/>
+                </a:solidFill>
+                <a:latin typeface="Consolas"/>
+              </a:rPr>
+              <a:t>&amp;</a:t>
+            </a:r>
+            <a:r>
+              <a:rPr sz="1600">
+                <a:solidFill>
+                  <a:srgbClr val="89DDFF"/>
+                </a:solidFill>
+                <a:latin typeface="Consolas"/>
+              </a:rPr>
+              <a:t>self</a:t>
+            </a:r>
+            <a:r>
+              <a:rPr sz="1600">
+                <a:solidFill>
+                  <a:srgbClr val="BAC2DE"/>
+                </a:solidFill>
+                <a:latin typeface="Consolas"/>
+              </a:rPr>
+              <a:t>,</a:t>
+            </a:r>
+            <a:r>
+              <a:rPr sz="1600">
+                <a:solidFill>
+                  <a:srgbClr val="EEFFFF"/>
+                </a:solidFill>
+                <a:latin typeface="Consolas"/>
+              </a:rPr>
+              <a:t> </a:t>
+            </a:r>
+            <a:r>
+              <a:rPr sz="1600">
+                <a:solidFill>
+                  <a:srgbClr val="EEFFFF"/>
+                </a:solidFill>
+                <a:latin typeface="Consolas"/>
+              </a:rPr>
+              <a:t>steps</a:t>
+            </a:r>
+            <a:r>
+              <a:rPr sz="1600">
+                <a:solidFill>
+                  <a:srgbClr val="BAC2DE"/>
+                </a:solidFill>
+                <a:latin typeface="Consolas"/>
+              </a:rPr>
+              <a:t>:</a:t>
+            </a:r>
+            <a:r>
+              <a:rPr sz="1600">
+                <a:solidFill>
+                  <a:srgbClr val="EEFFFF"/>
+                </a:solidFill>
+                <a:latin typeface="Consolas"/>
+              </a:rPr>
+              <a:t> </a:t>
+            </a:r>
+            <a:r>
+              <a:rPr sz="1600">
+                <a:solidFill>
+                  <a:srgbClr val="C792EA"/>
+                </a:solidFill>
+                <a:latin typeface="Consolas"/>
+              </a:rPr>
+              <a:t>&amp;</a:t>
+            </a:r>
+            <a:r>
+              <a:rPr sz="1600">
+                <a:solidFill>
+                  <a:srgbClr val="BAC2DE"/>
+                </a:solidFill>
+                <a:latin typeface="Consolas"/>
+              </a:rPr>
+              <a:t>[</a:t>
+            </a:r>
+            <a:r>
+              <a:rPr sz="1600">
+                <a:solidFill>
+                  <a:srgbClr val="BAC2DE"/>
+                </a:solidFill>
+                <a:latin typeface="Consolas"/>
+              </a:rPr>
+              <a:t>(</a:t>
+            </a:r>
+            <a:r>
+              <a:rPr sz="1600">
+                <a:solidFill>
+                  <a:srgbClr val="C792EA"/>
+                </a:solidFill>
+                <a:latin typeface="Consolas"/>
+              </a:rPr>
+              <a:t>u16</a:t>
+            </a:r>
+            <a:r>
+              <a:rPr sz="1600">
+                <a:solidFill>
+                  <a:srgbClr val="BAC2DE"/>
+                </a:solidFill>
+                <a:latin typeface="Consolas"/>
+              </a:rPr>
+              <a:t>,</a:t>
+            </a:r>
+            <a:r>
+              <a:rPr sz="1600">
+                <a:solidFill>
+                  <a:srgbClr val="EEFFFF"/>
+                </a:solidFill>
+                <a:latin typeface="Consolas"/>
+              </a:rPr>
+              <a:t> </a:t>
+            </a:r>
+            <a:r>
+              <a:rPr sz="1600">
+                <a:solidFill>
+                  <a:srgbClr val="C792EA"/>
+                </a:solidFill>
+                <a:latin typeface="Consolas"/>
+              </a:rPr>
+              <a:t>u64</a:t>
+            </a:r>
+            <a:r>
+              <a:rPr sz="1600">
+                <a:solidFill>
+                  <a:srgbClr val="BAC2DE"/>
+                </a:solidFill>
+                <a:latin typeface="Consolas"/>
+              </a:rPr>
+              <a:t>)</a:t>
+            </a:r>
+            <a:r>
+              <a:rPr sz="1600">
+                <a:solidFill>
+                  <a:srgbClr val="BAC2DE"/>
+                </a:solidFill>
+                <a:latin typeface="Consolas"/>
+              </a:rPr>
+              <a:t>]</a:t>
+            </a:r>
+            <a:r>
+              <a:rPr sz="1600">
+                <a:solidFill>
+                  <a:srgbClr val="BAC2DE"/>
+                </a:solidFill>
+                <a:latin typeface="Consolas"/>
+              </a:rPr>
+              <a:t>)</a:t>
+            </a:r>
+            <a:r>
+              <a:rPr sz="1600">
+                <a:solidFill>
+                  <a:srgbClr val="BAC2DE"/>
+                </a:solidFill>
+                <a:latin typeface="Consolas"/>
+              </a:rPr>
+              <a:t>;</a:t>
+            </a:r>
           </a:p>
           <a:p>
             <a:pPr>
@@ -3946,11 +4222,11 @@
             <a:r>
               <a:rPr sz="1600">
                 <a:solidFill>
-                  <a:srgbClr val="6A9955"/>
-                </a:solidFill>
-                <a:latin typeface="Consolas"/>
-              </a:rPr>
-              <a:t>// Concrete servo driver (similar naming to the real example): `ServoEsp`.</a:t>
+                  <a:srgbClr val="BAC2DE"/>
+                </a:solidFill>
+                <a:latin typeface="Consolas"/>
+              </a:rPr>
+              <a:t>}</a:t>
             </a:r>
           </a:p>
           <a:p>
@@ -3965,42 +4241,6 @@
                 <a:spcPts val="0"/>
               </a:spcAft>
             </a:pPr>
-            <a:r>
-              <a:rPr sz="1600">
-                <a:solidFill>
-                  <a:srgbClr val="C586C0"/>
-                </a:solidFill>
-                <a:latin typeface="Consolas"/>
-              </a:rPr>
-              <a:t>struct</a:t>
-            </a:r>
-            <a:r>
-              <a:rPr sz="1600">
-                <a:solidFill>
-                  <a:srgbClr val="DCDCDC"/>
-                </a:solidFill>
-                <a:latin typeface="Consolas"/>
-              </a:rPr>
-              <a:t> </a:t>
-            </a:r>
-            <a:r>
-              <a:rPr sz="1600">
-                <a:solidFill>
-                  <a:srgbClr val="4EC9B0"/>
-                </a:solidFill>
-                <a:latin typeface="Consolas"/>
-              </a:rPr>
-              <a:t>ServoEsp</a:t>
-            </a:r>
-            <a:r>
-              <a:rPr sz="1600">
-                <a:solidFill>
-                  <a:srgbClr val="DCDCDC"/>
-                </a:solidFill>
-                <a:latin typeface="Consolas"/>
-              </a:rPr>
-              <a:t>;</a:t>
-            </a:r>
           </a:p>
           <a:p>
             <a:pPr>
@@ -4014,12 +4254,15 @@
                 <a:spcPts val="0"/>
               </a:spcAft>
             </a:pPr>
-            <a:endParaRPr sz="1600">
-              <a:solidFill>
-                <a:srgbClr val="DCDCDC"/>
-              </a:solidFill>
-              <a:latin typeface="Consolas"/>
-            </a:endParaRPr>
+            <a:r>
+              <a:rPr sz="1600">
+                <a:solidFill>
+                  <a:srgbClr val="6A9955"/>
+                </a:solidFill>
+                <a:latin typeface="Consolas"/>
+              </a:rPr>
+              <a:t>// Concrete servo driver (similar naming to the real example): `ServoEsp`.</a:t>
+            </a:r>
           </a:p>
           <a:p>
             <a:pPr>
@@ -4036,38 +4279,38 @@
             <a:r>
               <a:rPr sz="1600">
                 <a:solidFill>
-                  <a:srgbClr val="C586C0"/>
-                </a:solidFill>
-                <a:latin typeface="Consolas"/>
-              </a:rPr>
-              <a:t>impl</a:t>
-            </a:r>
-            <a:r>
-              <a:rPr sz="1600">
-                <a:solidFill>
-                  <a:srgbClr val="DCDCDC"/>
-                </a:solidFill>
-                <a:latin typeface="Consolas"/>
-              </a:rPr>
-              <a:t> Servo </a:t>
-            </a:r>
-            <a:r>
-              <a:rPr sz="1600">
-                <a:solidFill>
-                  <a:srgbClr val="C586C0"/>
-                </a:solidFill>
-                <a:latin typeface="Consolas"/>
-              </a:rPr>
-              <a:t>for</a:t>
-            </a:r>
-            <a:r>
-              <a:rPr sz="1600">
-                <a:solidFill>
-                  <a:srgbClr val="DCDCDC"/>
-                </a:solidFill>
-                <a:latin typeface="Consolas"/>
-              </a:rPr>
-              <a:t> ServoEsp {</a:t>
+                  <a:srgbClr val="C792EA"/>
+                </a:solidFill>
+                <a:latin typeface="Consolas"/>
+              </a:rPr>
+              <a:t>struct</a:t>
+            </a:r>
+            <a:r>
+              <a:rPr sz="1600">
+                <a:solidFill>
+                  <a:srgbClr val="EEFFFF"/>
+                </a:solidFill>
+                <a:latin typeface="Consolas"/>
+              </a:rPr>
+              <a:t> </a:t>
+            </a:r>
+            <a:r>
+              <a:rPr sz="1600">
+                <a:solidFill>
+                  <a:srgbClr val="FFCB6B"/>
+                </a:solidFill>
+                <a:latin typeface="Consolas"/>
+              </a:rPr>
+              <a:t>ServoEsp</a:t>
+            </a:r>
+            <a:r>
+              <a:rPr sz="1600">
+                <a:solidFill>
+                  <a:srgbClr val="BAC2DE"/>
+                </a:solidFill>
+                <a:latin typeface="Consolas"/>
+              </a:rPr>
+              <a:t>;</a:t>
             </a:r>
           </a:p>
           <a:p>
@@ -4082,87 +4325,6 @@
                 <a:spcPts val="0"/>
               </a:spcAft>
             </a:pPr>
-            <a:r>
-              <a:rPr sz="1600">
-                <a:solidFill>
-                  <a:srgbClr val="DCDCDC"/>
-                </a:solidFill>
-                <a:latin typeface="Consolas"/>
-              </a:rPr>
-              <a:t>    </a:t>
-            </a:r>
-            <a:r>
-              <a:rPr sz="1600">
-                <a:solidFill>
-                  <a:srgbClr val="C586C0"/>
-                </a:solidFill>
-                <a:latin typeface="Consolas"/>
-              </a:rPr>
-              <a:t>fn</a:t>
-            </a:r>
-            <a:r>
-              <a:rPr sz="1600">
-                <a:solidFill>
-                  <a:srgbClr val="DCDCDC"/>
-                </a:solidFill>
-                <a:latin typeface="Consolas"/>
-              </a:rPr>
-              <a:t> </a:t>
-            </a:r>
-            <a:r>
-              <a:rPr sz="1600">
-                <a:solidFill>
-                  <a:srgbClr val="DCDCAA"/>
-                </a:solidFill>
-                <a:latin typeface="Consolas"/>
-              </a:rPr>
-              <a:t>set_degrees</a:t>
-            </a:r>
-            <a:r>
-              <a:rPr sz="1600">
-                <a:solidFill>
-                  <a:srgbClr val="DCDCDC"/>
-                </a:solidFill>
-                <a:latin typeface="Consolas"/>
-              </a:rPr>
-              <a:t>(&amp;</a:t>
-            </a:r>
-            <a:r>
-              <a:rPr sz="1600">
-                <a:solidFill>
-                  <a:srgbClr val="4EC9B0"/>
-                </a:solidFill>
-                <a:latin typeface="Consolas"/>
-              </a:rPr>
-              <a:t>self</a:t>
-            </a:r>
-            <a:r>
-              <a:rPr sz="1600">
-                <a:solidFill>
-                  <a:srgbClr val="DCDCDC"/>
-                </a:solidFill>
-                <a:latin typeface="Consolas"/>
-              </a:rPr>
-              <a:t>, degrees: </a:t>
-            </a:r>
-            <a:r>
-              <a:rPr sz="1600">
-                <a:solidFill>
-                  <a:srgbClr val="C586C0"/>
-                </a:solidFill>
-                <a:latin typeface="Consolas"/>
-              </a:rPr>
-              <a:t>u16</a:t>
-            </a:r>
-            <a:r>
-              <a:rPr sz="1600">
-                <a:solidFill>
-                  <a:srgbClr val="DCDCDC"/>
-                </a:solidFill>
-                <a:latin typeface="Consolas"/>
-              </a:rPr>
-              <a:t>) {</a:t>
-            </a:r>
           </a:p>
           <a:p>
             <a:pPr>
@@ -4179,47 +4341,83 @@
             <a:r>
               <a:rPr sz="1600">
                 <a:solidFill>
-                  <a:srgbClr val="DCDCDC"/>
-                </a:solidFill>
-                <a:latin typeface="Consolas"/>
-              </a:rPr>
-              <a:t>        </a:t>
-            </a:r>
-            <a:r>
-              <a:rPr sz="1600">
-                <a:solidFill>
-                  <a:srgbClr val="DCDCAA"/>
-                </a:solidFill>
-                <a:latin typeface="Consolas"/>
-              </a:rPr>
-              <a:t>println!</a:t>
-            </a:r>
-            <a:r>
-              <a:rPr sz="1600">
-                <a:solidFill>
-                  <a:srgbClr val="DCDCDC"/>
-                </a:solidFill>
-                <a:latin typeface="Consolas"/>
-              </a:rPr>
-              <a:t>(</a:t>
-            </a:r>
-            <a:r>
-              <a:rPr sz="1600">
-                <a:solidFill>
-                  <a:srgbClr val="CE9178"/>
-                </a:solidFill>
-                <a:latin typeface="Consolas"/>
-              </a:rPr>
-              <a:t>"[ServoEsp] set angle -&gt; {degrees}°"</a:t>
-            </a:r>
-            <a:r>
-              <a:rPr sz="1600">
-                <a:solidFill>
-                  <a:srgbClr val="DCDCDC"/>
-                </a:solidFill>
-                <a:latin typeface="Consolas"/>
-              </a:rPr>
-              <a:t>);</a:t>
+                  <a:srgbClr val="C792EA"/>
+                </a:solidFill>
+                <a:latin typeface="Consolas"/>
+              </a:rPr>
+              <a:t>impl</a:t>
+            </a:r>
+            <a:r>
+              <a:rPr sz="1600">
+                <a:solidFill>
+                  <a:srgbClr val="EEFFFF"/>
+                </a:solidFill>
+                <a:latin typeface="Consolas"/>
+              </a:rPr>
+              <a:t> </a:t>
+            </a:r>
+            <a:r>
+              <a:rPr sz="1600">
+                <a:solidFill>
+                  <a:srgbClr val="EEFFFF"/>
+                </a:solidFill>
+                <a:latin typeface="Consolas"/>
+              </a:rPr>
+              <a:t>Servo</a:t>
+            </a:r>
+            <a:r>
+              <a:rPr sz="1600">
+                <a:solidFill>
+                  <a:srgbClr val="EEFFFF"/>
+                </a:solidFill>
+                <a:latin typeface="Consolas"/>
+              </a:rPr>
+              <a:t> </a:t>
+            </a:r>
+            <a:r>
+              <a:rPr sz="1600">
+                <a:solidFill>
+                  <a:srgbClr val="C792EA"/>
+                </a:solidFill>
+                <a:latin typeface="Consolas"/>
+              </a:rPr>
+              <a:t>for</a:t>
+            </a:r>
+            <a:r>
+              <a:rPr sz="1600">
+                <a:solidFill>
+                  <a:srgbClr val="EEFFFF"/>
+                </a:solidFill>
+                <a:latin typeface="Consolas"/>
+              </a:rPr>
+              <a:t> </a:t>
+            </a:r>
+            <a:r>
+              <a:rPr sz="1600">
+                <a:solidFill>
+                  <a:srgbClr val="EEFFFF"/>
+                </a:solidFill>
+                <a:latin typeface="Consolas"/>
+              </a:rPr>
+              <a:t>ServoEsp</a:t>
+            </a:r>
+            <a:r>
+              <a:rPr sz="1600">
+                <a:solidFill>
+                  <a:srgbClr val="EEFFFF"/>
+                </a:solidFill>
+                <a:latin typeface="Consolas"/>
+              </a:rPr>
+              <a:t> </a:t>
+            </a:r>
+            <a:r>
+              <a:rPr sz="1600">
+                <a:solidFill>
+                  <a:srgbClr val="BAC2DE"/>
+                </a:solidFill>
+                <a:latin typeface="Consolas"/>
+              </a:rPr>
+              <a:t>{</a:t>
             </a:r>
           </a:p>
           <a:p>
@@ -4237,11 +4435,146 @@
             <a:r>
               <a:rPr sz="1600">
                 <a:solidFill>
-                  <a:srgbClr val="DCDCDC"/>
-                </a:solidFill>
-                <a:latin typeface="Consolas"/>
-              </a:rPr>
-              <a:t>    }</a:t>
+                  <a:srgbClr val="EEFFFF"/>
+                </a:solidFill>
+                <a:latin typeface="Consolas"/>
+              </a:rPr>
+              <a:t>    </a:t>
+            </a:r>
+            <a:r>
+              <a:rPr sz="1600">
+                <a:solidFill>
+                  <a:srgbClr val="C792EA"/>
+                </a:solidFill>
+                <a:latin typeface="Consolas"/>
+              </a:rPr>
+              <a:t>fn</a:t>
+            </a:r>
+            <a:r>
+              <a:rPr sz="1600">
+                <a:solidFill>
+                  <a:srgbClr val="EEFFFF"/>
+                </a:solidFill>
+                <a:latin typeface="Consolas"/>
+              </a:rPr>
+              <a:t> </a:t>
+            </a:r>
+            <a:r>
+              <a:rPr sz="1600">
+                <a:solidFill>
+                  <a:srgbClr val="82AAFF"/>
+                </a:solidFill>
+                <a:latin typeface="Consolas"/>
+              </a:rPr>
+              <a:t>set_degrees</a:t>
+            </a:r>
+            <a:r>
+              <a:rPr sz="1600">
+                <a:solidFill>
+                  <a:srgbClr val="BAC2DE"/>
+                </a:solidFill>
+                <a:latin typeface="Consolas"/>
+              </a:rPr>
+              <a:t>(</a:t>
+            </a:r>
+            <a:r>
+              <a:rPr sz="1600">
+                <a:solidFill>
+                  <a:srgbClr val="89DDFF"/>
+                </a:solidFill>
+                <a:latin typeface="Consolas"/>
+              </a:rPr>
+              <a:t>&amp;</a:t>
+            </a:r>
+            <a:r>
+              <a:rPr sz="1600">
+                <a:solidFill>
+                  <a:srgbClr val="89DDFF"/>
+                </a:solidFill>
+                <a:latin typeface="Consolas"/>
+              </a:rPr>
+              <a:t>self</a:t>
+            </a:r>
+            <a:r>
+              <a:rPr sz="1600">
+                <a:solidFill>
+                  <a:srgbClr val="BAC2DE"/>
+                </a:solidFill>
+                <a:latin typeface="Consolas"/>
+              </a:rPr>
+              <a:t>,</a:t>
+            </a:r>
+            <a:r>
+              <a:rPr sz="1600">
+                <a:solidFill>
+                  <a:srgbClr val="EEFFFF"/>
+                </a:solidFill>
+                <a:latin typeface="Consolas"/>
+              </a:rPr>
+              <a:t> </a:t>
+            </a:r>
+            <a:r>
+              <a:rPr sz="1600">
+                <a:solidFill>
+                  <a:srgbClr val="EEFFFF"/>
+                </a:solidFill>
+                <a:latin typeface="Consolas"/>
+              </a:rPr>
+              <a:t>degrees</a:t>
+            </a:r>
+            <a:r>
+              <a:rPr sz="1600">
+                <a:solidFill>
+                  <a:srgbClr val="BAC2DE"/>
+                </a:solidFill>
+                <a:latin typeface="Consolas"/>
+              </a:rPr>
+              <a:t>:</a:t>
+            </a:r>
+            <a:r>
+              <a:rPr sz="1600">
+                <a:solidFill>
+                  <a:srgbClr val="EEFFFF"/>
+                </a:solidFill>
+                <a:latin typeface="Consolas"/>
+              </a:rPr>
+              <a:t> </a:t>
+            </a:r>
+            <a:r>
+              <a:rPr sz="1600">
+                <a:solidFill>
+                  <a:srgbClr val="C792EA"/>
+                </a:solidFill>
+                <a:latin typeface="Consolas"/>
+              </a:rPr>
+              <a:t>u16</a:t>
+            </a:r>
+            <a:r>
+              <a:rPr sz="1600">
+                <a:solidFill>
+                  <a:srgbClr val="BAC2DE"/>
+                </a:solidFill>
+                <a:latin typeface="Consolas"/>
+              </a:rPr>
+              <a:t>)</a:t>
+            </a:r>
+            <a:r>
+              <a:rPr sz="1600">
+                <a:solidFill>
+                  <a:srgbClr val="EEFFFF"/>
+                </a:solidFill>
+                <a:latin typeface="Consolas"/>
+              </a:rPr>
+              <a:t> </a:t>
+            </a:r>
+            <a:r>
+              <a:rPr sz="1600">
+                <a:solidFill>
+                  <a:srgbClr val="BAC2DE"/>
+                </a:solidFill>
+                <a:latin typeface="Consolas"/>
+              </a:rPr>
+              <a:t>{</a:t>
             </a:r>
           </a:p>
           <a:p>
@@ -4259,11 +4592,74 @@
             <a:r>
               <a:rPr sz="1600">
                 <a:solidFill>
-                  <a:srgbClr val="DCDCDC"/>
-                </a:solidFill>
-                <a:latin typeface="Consolas"/>
-              </a:rPr>
-              <a:t>}</a:t>
+                  <a:srgbClr val="EEFFFF"/>
+                </a:solidFill>
+                <a:latin typeface="Consolas"/>
+              </a:rPr>
+              <a:t>        </a:t>
+            </a:r>
+            <a:r>
+              <a:rPr sz="1600">
+                <a:solidFill>
+                  <a:srgbClr val="82AAFF"/>
+                </a:solidFill>
+                <a:latin typeface="Consolas"/>
+              </a:rPr>
+              <a:t>println!</a:t>
+            </a:r>
+            <a:r>
+              <a:rPr sz="1600">
+                <a:solidFill>
+                  <a:srgbClr val="BAC2DE"/>
+                </a:solidFill>
+                <a:latin typeface="Consolas"/>
+              </a:rPr>
+              <a:t>(</a:t>
+            </a:r>
+            <a:r>
+              <a:rPr sz="1600">
+                <a:solidFill>
+                  <a:srgbClr val="C3E88D"/>
+                </a:solidFill>
+                <a:latin typeface="Consolas"/>
+              </a:rPr>
+              <a:t>"</a:t>
+            </a:r>
+            <a:r>
+              <a:rPr sz="1600">
+                <a:solidFill>
+                  <a:srgbClr val="C3E88D"/>
+                </a:solidFill>
+                <a:latin typeface="Consolas"/>
+              </a:rPr>
+              <a:t>[ServoEsp] set angle -&gt; {degrees}°</a:t>
+            </a:r>
+            <a:r>
+              <a:rPr sz="1600">
+                <a:solidFill>
+                  <a:srgbClr val="C3E88D"/>
+                </a:solidFill>
+                <a:latin typeface="Consolas"/>
+              </a:rPr>
+              <a:t>"</a:t>
+            </a:r>
+            <a:r>
+              <a:rPr sz="1600">
+                <a:solidFill>
+                  <a:srgbClr val="BAC2DE"/>
+                </a:solidFill>
+                <a:latin typeface="Consolas"/>
+              </a:rPr>
+              <a:t>)</a:t>
+            </a:r>
+            <a:r>
+              <a:rPr sz="1600">
+                <a:solidFill>
+                  <a:srgbClr val="BAC2DE"/>
+                </a:solidFill>
+                <a:latin typeface="Consolas"/>
+              </a:rPr>
+              <a:t>;</a:t>
             </a:r>
           </a:p>
           <a:p>
@@ -4278,12 +4674,24 @@
                 <a:spcPts val="0"/>
               </a:spcAft>
             </a:pPr>
-            <a:endParaRPr sz="1600">
-              <a:solidFill>
-                <a:srgbClr val="DCDCDC"/>
-              </a:solidFill>
-              <a:latin typeface="Consolas"/>
-            </a:endParaRPr>
+            <a:r>
+              <a:rPr sz="1600">
+                <a:solidFill>
+                  <a:srgbClr val="EEFFFF"/>
+                </a:solidFill>
+                <a:latin typeface="Consolas"/>
+              </a:rPr>
+              <a:t>    </a:t>
+            </a:r>
+            <a:r>
+              <a:rPr sz="1600">
+                <a:solidFill>
+                  <a:srgbClr val="BAC2DE"/>
+                </a:solidFill>
+                <a:latin typeface="Consolas"/>
+              </a:rPr>
+              <a:t>}</a:t>
+            </a:r>
           </a:p>
           <a:p>
             <a:pPr>
@@ -4300,11 +4708,11 @@
             <a:r>
               <a:rPr sz="1600">
                 <a:solidFill>
-                  <a:srgbClr val="6A9955"/>
-                </a:solidFill>
-                <a:latin typeface="Consolas"/>
-              </a:rPr>
-              <a:t>// Concrete servo player driver that can animate.</a:t>
+                  <a:srgbClr val="BAC2DE"/>
+                </a:solidFill>
+                <a:latin typeface="Consolas"/>
+              </a:rPr>
+              <a:t>}</a:t>
             </a:r>
           </a:p>
           <a:p>
@@ -4319,42 +4727,6 @@
                 <a:spcPts val="0"/>
               </a:spcAft>
             </a:pPr>
-            <a:r>
-              <a:rPr sz="1600">
-                <a:solidFill>
-                  <a:srgbClr val="C586C0"/>
-                </a:solidFill>
-                <a:latin typeface="Consolas"/>
-              </a:rPr>
-              <a:t>struct</a:t>
-            </a:r>
-            <a:r>
-              <a:rPr sz="1600">
-                <a:solidFill>
-                  <a:srgbClr val="DCDCDC"/>
-                </a:solidFill>
-                <a:latin typeface="Consolas"/>
-              </a:rPr>
-              <a:t> </a:t>
-            </a:r>
-            <a:r>
-              <a:rPr sz="1600">
-                <a:solidFill>
-                  <a:srgbClr val="4EC9B0"/>
-                </a:solidFill>
-                <a:latin typeface="Consolas"/>
-              </a:rPr>
-              <a:t>ServoPlayerEsp</a:t>
-            </a:r>
-            <a:r>
-              <a:rPr sz="1600">
-                <a:solidFill>
-                  <a:srgbClr val="DCDCDC"/>
-                </a:solidFill>
-                <a:latin typeface="Consolas"/>
-              </a:rPr>
-              <a:t>;</a:t>
-            </a:r>
           </a:p>
         </p:txBody>
       </p:sp>
@@ -4367,7 +4739,7 @@
 </file>
 
 <file path=ppt/slides/slide3.xml><?xml version="1.0" encoding="utf-8"?>
-<p:sld xmlns:a="http://schemas.openxmlformats.org/drawingml/2006/main" xmlns:r="http://schemas.openxmlformats.org/officeDocument/2006/relationships" xmlns:p="http://schemas.openxmlformats.org/presentationml/2006/main">
+<p:sld xmlns:a="http://schemas.openxmlformats.org/drawingml/2006/main" xmlns:p="http://schemas.openxmlformats.org/presentationml/2006/main" xmlns:r="http://schemas.openxmlformats.org/officeDocument/2006/relationships">
   <p:cSld>
     <p:spTree>
       <p:nvGrpSpPr>
@@ -4375,14 +4747,7 @@
         <p:cNvGrpSpPr/>
         <p:nvPr/>
       </p:nvGrpSpPr>
-      <p:grpSpPr>
-        <a:xfrm>
-          <a:off x="0" y="0"/>
-          <a:ext cx="0" cy="0"/>
-          <a:chOff x="0" y="0"/>
-          <a:chExt cx="0" cy="0"/>
-        </a:xfrm>
-      </p:grpSpPr>
+      <p:grpSpPr/>
       <p:sp>
         <p:nvSpPr>
           <p:cNvPr id="2" name="Rectangle 1"/>
@@ -4423,7 +4788,6 @@
           <a:lstStyle/>
           <a:p>
             <a:pPr algn="ctr"/>
-            <a:endParaRPr/>
           </a:p>
         </p:txBody>
       </p:sp>
@@ -4444,8 +4808,8 @@
           <a:noFill/>
         </p:spPr>
         <p:txBody>
-          <a:bodyPr wrap="none">
-            <a:spAutoFit/>
+          <a:bodyPr wrap="square">
+            <a:noAutofit/>
           </a:bodyPr>
           <a:lstStyle/>
           <a:p>
@@ -4460,7 +4824,15 @@
                 <a:spcPts val="0"/>
               </a:spcAft>
             </a:pPr>
-            <a:endParaRPr/>
+            <a:r>
+              <a:rPr sz="1600">
+                <a:solidFill>
+                  <a:srgbClr val="6A9955"/>
+                </a:solidFill>
+                <a:latin typeface="Consolas"/>
+              </a:rPr>
+              <a:t>// Concrete servo player driver that can animate.</a:t>
+            </a:r>
           </a:p>
           <a:p>
             <a:pPr>
@@ -4477,38 +4849,38 @@
             <a:r>
               <a:rPr sz="1600">
                 <a:solidFill>
-                  <a:srgbClr val="C586C0"/>
-                </a:solidFill>
-                <a:latin typeface="Consolas"/>
-              </a:rPr>
-              <a:t>impl</a:t>
-            </a:r>
-            <a:r>
-              <a:rPr sz="1600">
-                <a:solidFill>
-                  <a:srgbClr val="DCDCDC"/>
-                </a:solidFill>
-                <a:latin typeface="Consolas"/>
-              </a:rPr>
-              <a:t> Servo </a:t>
-            </a:r>
-            <a:r>
-              <a:rPr sz="1600">
-                <a:solidFill>
-                  <a:srgbClr val="C586C0"/>
-                </a:solidFill>
-                <a:latin typeface="Consolas"/>
-              </a:rPr>
-              <a:t>for</a:t>
-            </a:r>
-            <a:r>
-              <a:rPr sz="1600">
-                <a:solidFill>
-                  <a:srgbClr val="DCDCDC"/>
-                </a:solidFill>
-                <a:latin typeface="Consolas"/>
-              </a:rPr>
-              <a:t> ServoPlayerEsp {</a:t>
+                  <a:srgbClr val="C792EA"/>
+                </a:solidFill>
+                <a:latin typeface="Consolas"/>
+              </a:rPr>
+              <a:t>struct</a:t>
+            </a:r>
+            <a:r>
+              <a:rPr sz="1600">
+                <a:solidFill>
+                  <a:srgbClr val="EEFFFF"/>
+                </a:solidFill>
+                <a:latin typeface="Consolas"/>
+              </a:rPr>
+              <a:t> </a:t>
+            </a:r>
+            <a:r>
+              <a:rPr sz="1600">
+                <a:solidFill>
+                  <a:srgbClr val="FFCB6B"/>
+                </a:solidFill>
+                <a:latin typeface="Consolas"/>
+              </a:rPr>
+              <a:t>ServoPlayerEsp</a:t>
+            </a:r>
+            <a:r>
+              <a:rPr sz="1600">
+                <a:solidFill>
+                  <a:srgbClr val="BAC2DE"/>
+                </a:solidFill>
+                <a:latin typeface="Consolas"/>
+              </a:rPr>
+              <a:t>;</a:t>
             </a:r>
           </a:p>
           <a:p>
@@ -4523,87 +4895,6 @@
                 <a:spcPts val="0"/>
               </a:spcAft>
             </a:pPr>
-            <a:r>
-              <a:rPr sz="1600">
-                <a:solidFill>
-                  <a:srgbClr val="DCDCDC"/>
-                </a:solidFill>
-                <a:latin typeface="Consolas"/>
-              </a:rPr>
-              <a:t>    </a:t>
-            </a:r>
-            <a:r>
-              <a:rPr sz="1600">
-                <a:solidFill>
-                  <a:srgbClr val="C586C0"/>
-                </a:solidFill>
-                <a:latin typeface="Consolas"/>
-              </a:rPr>
-              <a:t>fn</a:t>
-            </a:r>
-            <a:r>
-              <a:rPr sz="1600">
-                <a:solidFill>
-                  <a:srgbClr val="DCDCDC"/>
-                </a:solidFill>
-                <a:latin typeface="Consolas"/>
-              </a:rPr>
-              <a:t> </a:t>
-            </a:r>
-            <a:r>
-              <a:rPr sz="1600">
-                <a:solidFill>
-                  <a:srgbClr val="DCDCAA"/>
-                </a:solidFill>
-                <a:latin typeface="Consolas"/>
-              </a:rPr>
-              <a:t>set_degrees</a:t>
-            </a:r>
-            <a:r>
-              <a:rPr sz="1600">
-                <a:solidFill>
-                  <a:srgbClr val="DCDCDC"/>
-                </a:solidFill>
-                <a:latin typeface="Consolas"/>
-              </a:rPr>
-              <a:t>(&amp;</a:t>
-            </a:r>
-            <a:r>
-              <a:rPr sz="1600">
-                <a:solidFill>
-                  <a:srgbClr val="4EC9B0"/>
-                </a:solidFill>
-                <a:latin typeface="Consolas"/>
-              </a:rPr>
-              <a:t>self</a:t>
-            </a:r>
-            <a:r>
-              <a:rPr sz="1600">
-                <a:solidFill>
-                  <a:srgbClr val="DCDCDC"/>
-                </a:solidFill>
-                <a:latin typeface="Consolas"/>
-              </a:rPr>
-              <a:t>, degrees: </a:t>
-            </a:r>
-            <a:r>
-              <a:rPr sz="1600">
-                <a:solidFill>
-                  <a:srgbClr val="C586C0"/>
-                </a:solidFill>
-                <a:latin typeface="Consolas"/>
-              </a:rPr>
-              <a:t>u16</a:t>
-            </a:r>
-            <a:r>
-              <a:rPr sz="1600">
-                <a:solidFill>
-                  <a:srgbClr val="DCDCDC"/>
-                </a:solidFill>
-                <a:latin typeface="Consolas"/>
-              </a:rPr>
-              <a:t>) {</a:t>
-            </a:r>
           </a:p>
           <a:p>
             <a:pPr>
@@ -4620,47 +4911,83 @@
             <a:r>
               <a:rPr sz="1600">
                 <a:solidFill>
-                  <a:srgbClr val="DCDCDC"/>
-                </a:solidFill>
-                <a:latin typeface="Consolas"/>
-              </a:rPr>
-              <a:t>        </a:t>
-            </a:r>
-            <a:r>
-              <a:rPr sz="1600">
-                <a:solidFill>
-                  <a:srgbClr val="DCDCAA"/>
-                </a:solidFill>
-                <a:latin typeface="Consolas"/>
-              </a:rPr>
-              <a:t>println!</a:t>
-            </a:r>
-            <a:r>
-              <a:rPr sz="1600">
-                <a:solidFill>
-                  <a:srgbClr val="DCDCDC"/>
-                </a:solidFill>
-                <a:latin typeface="Consolas"/>
-              </a:rPr>
-              <a:t>(</a:t>
-            </a:r>
-            <a:r>
-              <a:rPr sz="1600">
-                <a:solidFill>
-                  <a:srgbClr val="CE9178"/>
-                </a:solidFill>
-                <a:latin typeface="Consolas"/>
-              </a:rPr>
-              <a:t>"[ServoPlayerEsp] set angle -&gt; {degrees}°"</a:t>
-            </a:r>
-            <a:r>
-              <a:rPr sz="1600">
-                <a:solidFill>
-                  <a:srgbClr val="DCDCDC"/>
-                </a:solidFill>
-                <a:latin typeface="Consolas"/>
-              </a:rPr>
-              <a:t>);</a:t>
+                  <a:srgbClr val="C792EA"/>
+                </a:solidFill>
+                <a:latin typeface="Consolas"/>
+              </a:rPr>
+              <a:t>impl</a:t>
+            </a:r>
+            <a:r>
+              <a:rPr sz="1600">
+                <a:solidFill>
+                  <a:srgbClr val="EEFFFF"/>
+                </a:solidFill>
+                <a:latin typeface="Consolas"/>
+              </a:rPr>
+              <a:t> </a:t>
+            </a:r>
+            <a:r>
+              <a:rPr sz="1600">
+                <a:solidFill>
+                  <a:srgbClr val="EEFFFF"/>
+                </a:solidFill>
+                <a:latin typeface="Consolas"/>
+              </a:rPr>
+              <a:t>Servo</a:t>
+            </a:r>
+            <a:r>
+              <a:rPr sz="1600">
+                <a:solidFill>
+                  <a:srgbClr val="EEFFFF"/>
+                </a:solidFill>
+                <a:latin typeface="Consolas"/>
+              </a:rPr>
+              <a:t> </a:t>
+            </a:r>
+            <a:r>
+              <a:rPr sz="1600">
+                <a:solidFill>
+                  <a:srgbClr val="C792EA"/>
+                </a:solidFill>
+                <a:latin typeface="Consolas"/>
+              </a:rPr>
+              <a:t>for</a:t>
+            </a:r>
+            <a:r>
+              <a:rPr sz="1600">
+                <a:solidFill>
+                  <a:srgbClr val="EEFFFF"/>
+                </a:solidFill>
+                <a:latin typeface="Consolas"/>
+              </a:rPr>
+              <a:t> </a:t>
+            </a:r>
+            <a:r>
+              <a:rPr sz="1600">
+                <a:solidFill>
+                  <a:srgbClr val="EEFFFF"/>
+                </a:solidFill>
+                <a:latin typeface="Consolas"/>
+              </a:rPr>
+              <a:t>ServoPlayerEsp</a:t>
+            </a:r>
+            <a:r>
+              <a:rPr sz="1600">
+                <a:solidFill>
+                  <a:srgbClr val="EEFFFF"/>
+                </a:solidFill>
+                <a:latin typeface="Consolas"/>
+              </a:rPr>
+              <a:t> </a:t>
+            </a:r>
+            <a:r>
+              <a:rPr sz="1600">
+                <a:solidFill>
+                  <a:srgbClr val="BAC2DE"/>
+                </a:solidFill>
+                <a:latin typeface="Consolas"/>
+              </a:rPr>
+              <a:t>{</a:t>
             </a:r>
           </a:p>
           <a:p>
@@ -4678,11 +5005,146 @@
             <a:r>
               <a:rPr sz="1600">
                 <a:solidFill>
-                  <a:srgbClr val="DCDCDC"/>
-                </a:solidFill>
-                <a:latin typeface="Consolas"/>
-              </a:rPr>
-              <a:t>    }</a:t>
+                  <a:srgbClr val="EEFFFF"/>
+                </a:solidFill>
+                <a:latin typeface="Consolas"/>
+              </a:rPr>
+              <a:t>    </a:t>
+            </a:r>
+            <a:r>
+              <a:rPr sz="1600">
+                <a:solidFill>
+                  <a:srgbClr val="C792EA"/>
+                </a:solidFill>
+                <a:latin typeface="Consolas"/>
+              </a:rPr>
+              <a:t>fn</a:t>
+            </a:r>
+            <a:r>
+              <a:rPr sz="1600">
+                <a:solidFill>
+                  <a:srgbClr val="EEFFFF"/>
+                </a:solidFill>
+                <a:latin typeface="Consolas"/>
+              </a:rPr>
+              <a:t> </a:t>
+            </a:r>
+            <a:r>
+              <a:rPr sz="1600">
+                <a:solidFill>
+                  <a:srgbClr val="82AAFF"/>
+                </a:solidFill>
+                <a:latin typeface="Consolas"/>
+              </a:rPr>
+              <a:t>set_degrees</a:t>
+            </a:r>
+            <a:r>
+              <a:rPr sz="1600">
+                <a:solidFill>
+                  <a:srgbClr val="BAC2DE"/>
+                </a:solidFill>
+                <a:latin typeface="Consolas"/>
+              </a:rPr>
+              <a:t>(</a:t>
+            </a:r>
+            <a:r>
+              <a:rPr sz="1600">
+                <a:solidFill>
+                  <a:srgbClr val="89DDFF"/>
+                </a:solidFill>
+                <a:latin typeface="Consolas"/>
+              </a:rPr>
+              <a:t>&amp;</a:t>
+            </a:r>
+            <a:r>
+              <a:rPr sz="1600">
+                <a:solidFill>
+                  <a:srgbClr val="89DDFF"/>
+                </a:solidFill>
+                <a:latin typeface="Consolas"/>
+              </a:rPr>
+              <a:t>self</a:t>
+            </a:r>
+            <a:r>
+              <a:rPr sz="1600">
+                <a:solidFill>
+                  <a:srgbClr val="BAC2DE"/>
+                </a:solidFill>
+                <a:latin typeface="Consolas"/>
+              </a:rPr>
+              <a:t>,</a:t>
+            </a:r>
+            <a:r>
+              <a:rPr sz="1600">
+                <a:solidFill>
+                  <a:srgbClr val="EEFFFF"/>
+                </a:solidFill>
+                <a:latin typeface="Consolas"/>
+              </a:rPr>
+              <a:t> </a:t>
+            </a:r>
+            <a:r>
+              <a:rPr sz="1600">
+                <a:solidFill>
+                  <a:srgbClr val="EEFFFF"/>
+                </a:solidFill>
+                <a:latin typeface="Consolas"/>
+              </a:rPr>
+              <a:t>degrees</a:t>
+            </a:r>
+            <a:r>
+              <a:rPr sz="1600">
+                <a:solidFill>
+                  <a:srgbClr val="BAC2DE"/>
+                </a:solidFill>
+                <a:latin typeface="Consolas"/>
+              </a:rPr>
+              <a:t>:</a:t>
+            </a:r>
+            <a:r>
+              <a:rPr sz="1600">
+                <a:solidFill>
+                  <a:srgbClr val="EEFFFF"/>
+                </a:solidFill>
+                <a:latin typeface="Consolas"/>
+              </a:rPr>
+              <a:t> </a:t>
+            </a:r>
+            <a:r>
+              <a:rPr sz="1600">
+                <a:solidFill>
+                  <a:srgbClr val="C792EA"/>
+                </a:solidFill>
+                <a:latin typeface="Consolas"/>
+              </a:rPr>
+              <a:t>u16</a:t>
+            </a:r>
+            <a:r>
+              <a:rPr sz="1600">
+                <a:solidFill>
+                  <a:srgbClr val="BAC2DE"/>
+                </a:solidFill>
+                <a:latin typeface="Consolas"/>
+              </a:rPr>
+              <a:t>)</a:t>
+            </a:r>
+            <a:r>
+              <a:rPr sz="1600">
+                <a:solidFill>
+                  <a:srgbClr val="EEFFFF"/>
+                </a:solidFill>
+                <a:latin typeface="Consolas"/>
+              </a:rPr>
+              <a:t> </a:t>
+            </a:r>
+            <a:r>
+              <a:rPr sz="1600">
+                <a:solidFill>
+                  <a:srgbClr val="BAC2DE"/>
+                </a:solidFill>
+                <a:latin typeface="Consolas"/>
+              </a:rPr>
+              <a:t>{</a:t>
             </a:r>
           </a:p>
           <a:p>
@@ -4700,11 +5162,74 @@
             <a:r>
               <a:rPr sz="1600">
                 <a:solidFill>
-                  <a:srgbClr val="DCDCDC"/>
-                </a:solidFill>
-                <a:latin typeface="Consolas"/>
-              </a:rPr>
-              <a:t>}</a:t>
+                  <a:srgbClr val="EEFFFF"/>
+                </a:solidFill>
+                <a:latin typeface="Consolas"/>
+              </a:rPr>
+              <a:t>        </a:t>
+            </a:r>
+            <a:r>
+              <a:rPr sz="1600">
+                <a:solidFill>
+                  <a:srgbClr val="82AAFF"/>
+                </a:solidFill>
+                <a:latin typeface="Consolas"/>
+              </a:rPr>
+              <a:t>println!</a:t>
+            </a:r>
+            <a:r>
+              <a:rPr sz="1600">
+                <a:solidFill>
+                  <a:srgbClr val="BAC2DE"/>
+                </a:solidFill>
+                <a:latin typeface="Consolas"/>
+              </a:rPr>
+              <a:t>(</a:t>
+            </a:r>
+            <a:r>
+              <a:rPr sz="1600">
+                <a:solidFill>
+                  <a:srgbClr val="C3E88D"/>
+                </a:solidFill>
+                <a:latin typeface="Consolas"/>
+              </a:rPr>
+              <a:t>"</a:t>
+            </a:r>
+            <a:r>
+              <a:rPr sz="1600">
+                <a:solidFill>
+                  <a:srgbClr val="C3E88D"/>
+                </a:solidFill>
+                <a:latin typeface="Consolas"/>
+              </a:rPr>
+              <a:t>[ServoPlayerEsp] set angle -&gt; {degrees}°</a:t>
+            </a:r>
+            <a:r>
+              <a:rPr sz="1600">
+                <a:solidFill>
+                  <a:srgbClr val="C3E88D"/>
+                </a:solidFill>
+                <a:latin typeface="Consolas"/>
+              </a:rPr>
+              <a:t>"</a:t>
+            </a:r>
+            <a:r>
+              <a:rPr sz="1600">
+                <a:solidFill>
+                  <a:srgbClr val="BAC2DE"/>
+                </a:solidFill>
+                <a:latin typeface="Consolas"/>
+              </a:rPr>
+              <a:t>)</a:t>
+            </a:r>
+            <a:r>
+              <a:rPr sz="1600">
+                <a:solidFill>
+                  <a:srgbClr val="BAC2DE"/>
+                </a:solidFill>
+                <a:latin typeface="Consolas"/>
+              </a:rPr>
+              <a:t>;</a:t>
             </a:r>
           </a:p>
           <a:p>
@@ -4719,12 +5244,24 @@
                 <a:spcPts val="0"/>
               </a:spcAft>
             </a:pPr>
-            <a:endParaRPr sz="1600">
-              <a:solidFill>
-                <a:srgbClr val="DCDCDC"/>
-              </a:solidFill>
-              <a:latin typeface="Consolas"/>
-            </a:endParaRPr>
+            <a:r>
+              <a:rPr sz="1600">
+                <a:solidFill>
+                  <a:srgbClr val="EEFFFF"/>
+                </a:solidFill>
+                <a:latin typeface="Consolas"/>
+              </a:rPr>
+              <a:t>    </a:t>
+            </a:r>
+            <a:r>
+              <a:rPr sz="1600">
+                <a:solidFill>
+                  <a:srgbClr val="BAC2DE"/>
+                </a:solidFill>
+                <a:latin typeface="Consolas"/>
+              </a:rPr>
+              <a:t>}</a:t>
+            </a:r>
           </a:p>
           <a:p>
             <a:pPr>
@@ -4741,38 +5278,11 @@
             <a:r>
               <a:rPr sz="1600">
                 <a:solidFill>
-                  <a:srgbClr val="C586C0"/>
-                </a:solidFill>
-                <a:latin typeface="Consolas"/>
-              </a:rPr>
-              <a:t>impl</a:t>
-            </a:r>
-            <a:r>
-              <a:rPr sz="1600">
-                <a:solidFill>
-                  <a:srgbClr val="DCDCDC"/>
-                </a:solidFill>
-                <a:latin typeface="Consolas"/>
-              </a:rPr>
-              <a:t> ServoPlayer </a:t>
-            </a:r>
-            <a:r>
-              <a:rPr sz="1600">
-                <a:solidFill>
-                  <a:srgbClr val="C586C0"/>
-                </a:solidFill>
-                <a:latin typeface="Consolas"/>
-              </a:rPr>
-              <a:t>for</a:t>
-            </a:r>
-            <a:r>
-              <a:rPr sz="1600">
-                <a:solidFill>
-                  <a:srgbClr val="DCDCDC"/>
-                </a:solidFill>
-                <a:latin typeface="Consolas"/>
-              </a:rPr>
-              <a:t> ServoPlayerEsp {</a:t>
+                  <a:srgbClr val="BAC2DE"/>
+                </a:solidFill>
+                <a:latin typeface="Consolas"/>
+              </a:rPr>
+              <a:t>}</a:t>
             </a:r>
           </a:p>
           <a:p>
@@ -4787,123 +5297,6 @@
                 <a:spcPts val="0"/>
               </a:spcAft>
             </a:pPr>
-            <a:r>
-              <a:rPr sz="1600">
-                <a:solidFill>
-                  <a:srgbClr val="DCDCDC"/>
-                </a:solidFill>
-                <a:latin typeface="Consolas"/>
-              </a:rPr>
-              <a:t>    </a:t>
-            </a:r>
-            <a:r>
-              <a:rPr sz="1600">
-                <a:solidFill>
-                  <a:srgbClr val="C586C0"/>
-                </a:solidFill>
-                <a:latin typeface="Consolas"/>
-              </a:rPr>
-              <a:t>fn</a:t>
-            </a:r>
-            <a:r>
-              <a:rPr sz="1600">
-                <a:solidFill>
-                  <a:srgbClr val="DCDCDC"/>
-                </a:solidFill>
-                <a:latin typeface="Consolas"/>
-              </a:rPr>
-              <a:t> </a:t>
-            </a:r>
-            <a:r>
-              <a:rPr sz="1600">
-                <a:solidFill>
-                  <a:srgbClr val="DCDCAA"/>
-                </a:solidFill>
-                <a:latin typeface="Consolas"/>
-              </a:rPr>
-              <a:t>animate</a:t>
-            </a:r>
-            <a:r>
-              <a:rPr sz="1600">
-                <a:solidFill>
-                  <a:srgbClr val="DCDCDC"/>
-                </a:solidFill>
-                <a:latin typeface="Consolas"/>
-              </a:rPr>
-              <a:t>(&amp;</a:t>
-            </a:r>
-            <a:r>
-              <a:rPr sz="1600">
-                <a:solidFill>
-                  <a:srgbClr val="4EC9B0"/>
-                </a:solidFill>
-                <a:latin typeface="Consolas"/>
-              </a:rPr>
-              <a:t>self</a:t>
-            </a:r>
-            <a:r>
-              <a:rPr sz="1600">
-                <a:solidFill>
-                  <a:srgbClr val="DCDCDC"/>
-                </a:solidFill>
-                <a:latin typeface="Consolas"/>
-              </a:rPr>
-              <a:t>, steps: </a:t>
-            </a:r>
-            <a:r>
-              <a:rPr sz="1600">
-                <a:solidFill>
-                  <a:srgbClr val="C586C0"/>
-                </a:solidFill>
-                <a:latin typeface="Consolas"/>
-              </a:rPr>
-              <a:t>&amp;</a:t>
-            </a:r>
-            <a:r>
-              <a:rPr sz="1600">
-                <a:solidFill>
-                  <a:srgbClr val="DCDCDC"/>
-                </a:solidFill>
-                <a:latin typeface="Consolas"/>
-              </a:rPr>
-              <a:t>[(</a:t>
-            </a:r>
-            <a:r>
-              <a:rPr sz="1600">
-                <a:solidFill>
-                  <a:srgbClr val="C586C0"/>
-                </a:solidFill>
-                <a:latin typeface="Consolas"/>
-              </a:rPr>
-              <a:t>u16</a:t>
-            </a:r>
-            <a:r>
-              <a:rPr sz="1600">
-                <a:solidFill>
-                  <a:srgbClr val="DCDCDC"/>
-                </a:solidFill>
-                <a:latin typeface="Consolas"/>
-              </a:rPr>
-              <a:t>, </a:t>
-            </a:r>
-            <a:r>
-              <a:rPr sz="1600">
-                <a:solidFill>
-                  <a:srgbClr val="C586C0"/>
-                </a:solidFill>
-                <a:latin typeface="Consolas"/>
-              </a:rPr>
-              <a:t>u64</a:t>
-            </a:r>
-            <a:r>
-              <a:rPr sz="1600">
-                <a:solidFill>
-                  <a:srgbClr val="DCDCDC"/>
-                </a:solidFill>
-                <a:latin typeface="Consolas"/>
-              </a:rPr>
-              <a:t>)]) {</a:t>
-            </a:r>
           </a:p>
           <a:p>
             <a:pPr>
@@ -4920,16 +5313,43 @@
             <a:r>
               <a:rPr sz="1600">
                 <a:solidFill>
-                  <a:srgbClr val="DCDCDC"/>
-                </a:solidFill>
-                <a:latin typeface="Consolas"/>
-              </a:rPr>
-              <a:t>        </a:t>
-            </a:r>
-            <a:r>
-              <a:rPr sz="1600">
-                <a:solidFill>
-                  <a:srgbClr val="C586C0"/>
+                  <a:srgbClr val="C792EA"/>
+                </a:solidFill>
+                <a:latin typeface="Consolas"/>
+              </a:rPr>
+              <a:t>impl</a:t>
+            </a:r>
+            <a:r>
+              <a:rPr sz="1600">
+                <a:solidFill>
+                  <a:srgbClr val="EEFFFF"/>
+                </a:solidFill>
+                <a:latin typeface="Consolas"/>
+              </a:rPr>
+              <a:t> </a:t>
+            </a:r>
+            <a:r>
+              <a:rPr sz="1600">
+                <a:solidFill>
+                  <a:srgbClr val="EEFFFF"/>
+                </a:solidFill>
+                <a:latin typeface="Consolas"/>
+              </a:rPr>
+              <a:t>ServoPlayer</a:t>
+            </a:r>
+            <a:r>
+              <a:rPr sz="1600">
+                <a:solidFill>
+                  <a:srgbClr val="EEFFFF"/>
+                </a:solidFill>
+                <a:latin typeface="Consolas"/>
+              </a:rPr>
+              <a:t> </a:t>
+            </a:r>
+            <a:r>
+              <a:rPr sz="1600">
+                <a:solidFill>
+                  <a:srgbClr val="C792EA"/>
                 </a:solidFill>
                 <a:latin typeface="Consolas"/>
               </a:rPr>
@@ -4938,29 +5358,38 @@
             <a:r>
               <a:rPr sz="1600">
                 <a:solidFill>
-                  <a:srgbClr val="DCDCDC"/>
-                </a:solidFill>
-                <a:latin typeface="Consolas"/>
-              </a:rPr>
-              <a:t> (degrees, ms) </a:t>
-            </a:r>
-            <a:r>
-              <a:rPr sz="1600">
-                <a:solidFill>
-                  <a:srgbClr val="C586C0"/>
-                </a:solidFill>
-                <a:latin typeface="Consolas"/>
-              </a:rPr>
-              <a:t>in</a:t>
-            </a:r>
-            <a:r>
-              <a:rPr sz="1600">
-                <a:solidFill>
-                  <a:srgbClr val="DCDCDC"/>
-                </a:solidFill>
-                <a:latin typeface="Consolas"/>
-              </a:rPr>
-              <a:t> steps {</a:t>
+                  <a:srgbClr val="EEFFFF"/>
+                </a:solidFill>
+                <a:latin typeface="Consolas"/>
+              </a:rPr>
+              <a:t> </a:t>
+            </a:r>
+            <a:r>
+              <a:rPr sz="1600">
+                <a:solidFill>
+                  <a:srgbClr val="EEFFFF"/>
+                </a:solidFill>
+                <a:latin typeface="Consolas"/>
+              </a:rPr>
+              <a:t>ServoPlayerEsp</a:t>
+            </a:r>
+            <a:r>
+              <a:rPr sz="1600">
+                <a:solidFill>
+                  <a:srgbClr val="EEFFFF"/>
+                </a:solidFill>
+                <a:latin typeface="Consolas"/>
+              </a:rPr>
+              <a:t> </a:t>
+            </a:r>
+            <a:r>
+              <a:rPr sz="1600">
+                <a:solidFill>
+                  <a:srgbClr val="BAC2DE"/>
+                </a:solidFill>
+                <a:latin typeface="Consolas"/>
+              </a:rPr>
+              <a:t>{</a:t>
             </a:r>
           </a:p>
           <a:p>
@@ -4978,16 +5407,61 @@
             <a:r>
               <a:rPr sz="1600">
                 <a:solidFill>
-                  <a:srgbClr val="DCDCDC"/>
-                </a:solidFill>
-                <a:latin typeface="Consolas"/>
-              </a:rPr>
-              <a:t>            </a:t>
-            </a:r>
-            <a:r>
-              <a:rPr sz="1600">
-                <a:solidFill>
-                  <a:srgbClr val="4EC9B0"/>
+                  <a:srgbClr val="EEFFFF"/>
+                </a:solidFill>
+                <a:latin typeface="Consolas"/>
+              </a:rPr>
+              <a:t>    </a:t>
+            </a:r>
+            <a:r>
+              <a:rPr sz="1600">
+                <a:solidFill>
+                  <a:srgbClr val="C792EA"/>
+                </a:solidFill>
+                <a:latin typeface="Consolas"/>
+              </a:rPr>
+              <a:t>fn</a:t>
+            </a:r>
+            <a:r>
+              <a:rPr sz="1600">
+                <a:solidFill>
+                  <a:srgbClr val="EEFFFF"/>
+                </a:solidFill>
+                <a:latin typeface="Consolas"/>
+              </a:rPr>
+              <a:t> </a:t>
+            </a:r>
+            <a:r>
+              <a:rPr sz="1600">
+                <a:solidFill>
+                  <a:srgbClr val="82AAFF"/>
+                </a:solidFill>
+                <a:latin typeface="Consolas"/>
+              </a:rPr>
+              <a:t>animate</a:t>
+            </a:r>
+            <a:r>
+              <a:rPr sz="1600">
+                <a:solidFill>
+                  <a:srgbClr val="BAC2DE"/>
+                </a:solidFill>
+                <a:latin typeface="Consolas"/>
+              </a:rPr>
+              <a:t>(</a:t>
+            </a:r>
+            <a:r>
+              <a:rPr sz="1600">
+                <a:solidFill>
+                  <a:srgbClr val="89DDFF"/>
+                </a:solidFill>
+                <a:latin typeface="Consolas"/>
+              </a:rPr>
+              <a:t>&amp;</a:t>
+            </a:r>
+            <a:r>
+              <a:rPr sz="1600">
+                <a:solidFill>
+                  <a:srgbClr val="89DDFF"/>
                 </a:solidFill>
                 <a:latin typeface="Consolas"/>
               </a:rPr>
@@ -4996,11 +5470,155 @@
             <a:r>
               <a:rPr sz="1600">
                 <a:solidFill>
-                  <a:srgbClr val="DCDCDC"/>
-                </a:solidFill>
-                <a:latin typeface="Consolas"/>
-              </a:rPr>
-              <a:t>.set_degrees(*degrees);</a:t>
+                  <a:srgbClr val="BAC2DE"/>
+                </a:solidFill>
+                <a:latin typeface="Consolas"/>
+              </a:rPr>
+              <a:t>,</a:t>
+            </a:r>
+            <a:r>
+              <a:rPr sz="1600">
+                <a:solidFill>
+                  <a:srgbClr val="EEFFFF"/>
+                </a:solidFill>
+                <a:latin typeface="Consolas"/>
+              </a:rPr>
+              <a:t> </a:t>
+            </a:r>
+            <a:r>
+              <a:rPr sz="1600">
+                <a:solidFill>
+                  <a:srgbClr val="EEFFFF"/>
+                </a:solidFill>
+                <a:latin typeface="Consolas"/>
+              </a:rPr>
+              <a:t>steps</a:t>
+            </a:r>
+            <a:r>
+              <a:rPr sz="1600">
+                <a:solidFill>
+                  <a:srgbClr val="BAC2DE"/>
+                </a:solidFill>
+                <a:latin typeface="Consolas"/>
+              </a:rPr>
+              <a:t>:</a:t>
+            </a:r>
+            <a:r>
+              <a:rPr sz="1600">
+                <a:solidFill>
+                  <a:srgbClr val="EEFFFF"/>
+                </a:solidFill>
+                <a:latin typeface="Consolas"/>
+              </a:rPr>
+              <a:t> </a:t>
+            </a:r>
+            <a:r>
+              <a:rPr sz="1600">
+                <a:solidFill>
+                  <a:srgbClr val="C792EA"/>
+                </a:solidFill>
+                <a:latin typeface="Consolas"/>
+              </a:rPr>
+              <a:t>&amp;</a:t>
+            </a:r>
+            <a:r>
+              <a:rPr sz="1600">
+                <a:solidFill>
+                  <a:srgbClr val="BAC2DE"/>
+                </a:solidFill>
+                <a:latin typeface="Consolas"/>
+              </a:rPr>
+              <a:t>[</a:t>
+            </a:r>
+            <a:r>
+              <a:rPr sz="1600">
+                <a:solidFill>
+                  <a:srgbClr val="BAC2DE"/>
+                </a:solidFill>
+                <a:latin typeface="Consolas"/>
+              </a:rPr>
+              <a:t>(</a:t>
+            </a:r>
+            <a:r>
+              <a:rPr sz="1600">
+                <a:solidFill>
+                  <a:srgbClr val="C792EA"/>
+                </a:solidFill>
+                <a:latin typeface="Consolas"/>
+              </a:rPr>
+              <a:t>u16</a:t>
+            </a:r>
+            <a:r>
+              <a:rPr sz="1600">
+                <a:solidFill>
+                  <a:srgbClr val="BAC2DE"/>
+                </a:solidFill>
+                <a:latin typeface="Consolas"/>
+              </a:rPr>
+              <a:t>,</a:t>
+            </a:r>
+            <a:r>
+              <a:rPr sz="1600">
+                <a:solidFill>
+                  <a:srgbClr val="EEFFFF"/>
+                </a:solidFill>
+                <a:latin typeface="Consolas"/>
+              </a:rPr>
+              <a:t> </a:t>
+            </a:r>
+            <a:r>
+              <a:rPr sz="1600">
+                <a:solidFill>
+                  <a:srgbClr val="C792EA"/>
+                </a:solidFill>
+                <a:latin typeface="Consolas"/>
+              </a:rPr>
+              <a:t>u64</a:t>
+            </a:r>
+            <a:r>
+              <a:rPr sz="1600">
+                <a:solidFill>
+                  <a:srgbClr val="BAC2DE"/>
+                </a:solidFill>
+                <a:latin typeface="Consolas"/>
+              </a:rPr>
+              <a:t>)</a:t>
+            </a:r>
+            <a:r>
+              <a:rPr sz="1600">
+                <a:solidFill>
+                  <a:srgbClr val="BAC2DE"/>
+                </a:solidFill>
+                <a:latin typeface="Consolas"/>
+              </a:rPr>
+              <a:t>]</a:t>
+            </a:r>
+            <a:r>
+              <a:rPr sz="1600">
+                <a:solidFill>
+                  <a:srgbClr val="BAC2DE"/>
+                </a:solidFill>
+                <a:latin typeface="Consolas"/>
+              </a:rPr>
+              <a:t>)</a:t>
+            </a:r>
+            <a:r>
+              <a:rPr sz="1600">
+                <a:solidFill>
+                  <a:srgbClr val="EEFFFF"/>
+                </a:solidFill>
+                <a:latin typeface="Consolas"/>
+              </a:rPr>
+              <a:t> </a:t>
+            </a:r>
+            <a:r>
+              <a:rPr sz="1600">
+                <a:solidFill>
+                  <a:srgbClr val="BAC2DE"/>
+                </a:solidFill>
+                <a:latin typeface="Consolas"/>
+              </a:rPr>
+              <a:t>{</a:t>
             </a:r>
           </a:p>
           <a:p>
@@ -5018,25 +5636,34 @@
             <a:r>
               <a:rPr sz="1600">
                 <a:solidFill>
-                  <a:srgbClr val="DCDCDC"/>
-                </a:solidFill>
-                <a:latin typeface="Consolas"/>
-              </a:rPr>
-              <a:t>            </a:t>
-            </a:r>
-            <a:r>
-              <a:rPr sz="1600">
-                <a:solidFill>
-                  <a:srgbClr val="DCDCAA"/>
-                </a:solidFill>
-                <a:latin typeface="Consolas"/>
-              </a:rPr>
-              <a:t>println!</a:t>
-            </a:r>
-            <a:r>
-              <a:rPr sz="1600">
-                <a:solidFill>
-                  <a:srgbClr val="DCDCDC"/>
+                  <a:srgbClr val="EEFFFF"/>
+                </a:solidFill>
+                <a:latin typeface="Consolas"/>
+              </a:rPr>
+              <a:t>        </a:t>
+            </a:r>
+            <a:r>
+              <a:rPr sz="1600">
+                <a:solidFill>
+                  <a:srgbClr val="C792EA"/>
+                </a:solidFill>
+                <a:latin typeface="Consolas"/>
+              </a:rPr>
+              <a:t>for</a:t>
+            </a:r>
+            <a:r>
+              <a:rPr sz="1600">
+                <a:solidFill>
+                  <a:srgbClr val="EEFFFF"/>
+                </a:solidFill>
+                <a:latin typeface="Consolas"/>
+              </a:rPr>
+              <a:t> </a:t>
+            </a:r>
+            <a:r>
+              <a:rPr sz="1600">
+                <a:solidFill>
+                  <a:srgbClr val="BAC2DE"/>
                 </a:solidFill>
                 <a:latin typeface="Consolas"/>
               </a:rPr>
@@ -5045,20 +5672,101 @@
             <a:r>
               <a:rPr sz="1600">
                 <a:solidFill>
-                  <a:srgbClr val="CE9178"/>
-                </a:solidFill>
-                <a:latin typeface="Consolas"/>
-              </a:rPr>
-              <a:t>"[ServoPlayerEsp] hold for {ms}ms"</a:t>
-            </a:r>
-            <a:r>
-              <a:rPr sz="1600">
-                <a:solidFill>
-                  <a:srgbClr val="DCDCDC"/>
-                </a:solidFill>
-                <a:latin typeface="Consolas"/>
-              </a:rPr>
-              <a:t>);</a:t>
+                  <a:srgbClr val="EEFFFF"/>
+                </a:solidFill>
+                <a:latin typeface="Consolas"/>
+              </a:rPr>
+              <a:t>degrees</a:t>
+            </a:r>
+            <a:r>
+              <a:rPr sz="1600">
+                <a:solidFill>
+                  <a:srgbClr val="BAC2DE"/>
+                </a:solidFill>
+                <a:latin typeface="Consolas"/>
+              </a:rPr>
+              <a:t>,</a:t>
+            </a:r>
+            <a:r>
+              <a:rPr sz="1600">
+                <a:solidFill>
+                  <a:srgbClr val="EEFFFF"/>
+                </a:solidFill>
+                <a:latin typeface="Consolas"/>
+              </a:rPr>
+              <a:t> </a:t>
+            </a:r>
+            <a:r>
+              <a:rPr sz="1600">
+                <a:solidFill>
+                  <a:srgbClr val="EEFFFF"/>
+                </a:solidFill>
+                <a:latin typeface="Consolas"/>
+              </a:rPr>
+              <a:t>ms</a:t>
+            </a:r>
+            <a:r>
+              <a:rPr sz="1600">
+                <a:solidFill>
+                  <a:srgbClr val="BAC2DE"/>
+                </a:solidFill>
+                <a:latin typeface="Consolas"/>
+              </a:rPr>
+              <a:t>)</a:t>
+            </a:r>
+            <a:r>
+              <a:rPr sz="1600">
+                <a:solidFill>
+                  <a:srgbClr val="EEFFFF"/>
+                </a:solidFill>
+                <a:latin typeface="Consolas"/>
+              </a:rPr>
+              <a:t> </a:t>
+            </a:r>
+            <a:r>
+              <a:rPr sz="1600">
+                <a:solidFill>
+                  <a:srgbClr val="C792EA"/>
+                </a:solidFill>
+                <a:latin typeface="Consolas"/>
+              </a:rPr>
+              <a:t>in</a:t>
+            </a:r>
+            <a:r>
+              <a:rPr sz="1600">
+                <a:solidFill>
+                  <a:srgbClr val="EEFFFF"/>
+                </a:solidFill>
+                <a:latin typeface="Consolas"/>
+              </a:rPr>
+              <a:t> </a:t>
+            </a:r>
+            <a:r>
+              <a:rPr sz="1600">
+                <a:solidFill>
+                  <a:srgbClr val="EEFFFF"/>
+                </a:solidFill>
+                <a:latin typeface="Consolas"/>
+              </a:rPr>
+              <a:t>steps</a:t>
+            </a:r>
+            <a:r>
+              <a:rPr sz="1600">
+                <a:solidFill>
+                  <a:srgbClr val="EEFFFF"/>
+                </a:solidFill>
+                <a:latin typeface="Consolas"/>
+              </a:rPr>
+              <a:t> </a:t>
+            </a:r>
+            <a:r>
+              <a:rPr sz="1600">
+                <a:solidFill>
+                  <a:srgbClr val="BAC2DE"/>
+                </a:solidFill>
+                <a:latin typeface="Consolas"/>
+              </a:rPr>
+              <a:t>{</a:t>
             </a:r>
           </a:p>
           <a:p>
@@ -5076,11 +5784,83 @@
             <a:r>
               <a:rPr sz="1600">
                 <a:solidFill>
-                  <a:srgbClr val="DCDCDC"/>
-                </a:solidFill>
-                <a:latin typeface="Consolas"/>
-              </a:rPr>
-              <a:t>            thread::sleep(Duration::from_millis(*ms));</a:t>
+                  <a:srgbClr val="EEFFFF"/>
+                </a:solidFill>
+                <a:latin typeface="Consolas"/>
+              </a:rPr>
+              <a:t>            </a:t>
+            </a:r>
+            <a:r>
+              <a:rPr sz="1600">
+                <a:solidFill>
+                  <a:srgbClr val="89DDFF"/>
+                </a:solidFill>
+                <a:latin typeface="Consolas"/>
+              </a:rPr>
+              <a:t>self</a:t>
+            </a:r>
+            <a:r>
+              <a:rPr sz="1600">
+                <a:solidFill>
+                  <a:srgbClr val="BAC2DE"/>
+                </a:solidFill>
+                <a:latin typeface="Consolas"/>
+              </a:rPr>
+              <a:t>.</a:t>
+            </a:r>
+            <a:r>
+              <a:rPr sz="1600">
+                <a:solidFill>
+                  <a:srgbClr val="EEFFFF"/>
+                </a:solidFill>
+                <a:latin typeface="Consolas"/>
+              </a:rPr>
+              <a:t>set_degrees</a:t>
+            </a:r>
+            <a:r>
+              <a:rPr sz="1600">
+                <a:solidFill>
+                  <a:srgbClr val="BAC2DE"/>
+                </a:solidFill>
+                <a:latin typeface="Consolas"/>
+              </a:rPr>
+              <a:t>(</a:t>
+            </a:r>
+            <a:r>
+              <a:rPr sz="1600">
+                <a:solidFill>
+                  <a:srgbClr val="89DDFF"/>
+                </a:solidFill>
+                <a:latin typeface="Consolas"/>
+              </a:rPr>
+              <a:t>*</a:t>
+            </a:r>
+            <a:r>
+              <a:rPr sz="1600">
+                <a:solidFill>
+                  <a:srgbClr val="EEFFFF"/>
+                </a:solidFill>
+                <a:latin typeface="Consolas"/>
+              </a:rPr>
+              <a:t>degrees</a:t>
+            </a:r>
+            <a:r>
+              <a:rPr sz="1600">
+                <a:solidFill>
+                  <a:srgbClr val="BAC2DE"/>
+                </a:solidFill>
+                <a:latin typeface="Consolas"/>
+              </a:rPr>
+              <a:t>)</a:t>
+            </a:r>
+            <a:r>
+              <a:rPr sz="1600">
+                <a:solidFill>
+                  <a:srgbClr val="BAC2DE"/>
+                </a:solidFill>
+                <a:latin typeface="Consolas"/>
+              </a:rPr>
+              <a:t>;</a:t>
             </a:r>
           </a:p>
           <a:p>
@@ -5098,11 +5878,74 @@
             <a:r>
               <a:rPr sz="1600">
                 <a:solidFill>
-                  <a:srgbClr val="DCDCDC"/>
-                </a:solidFill>
-                <a:latin typeface="Consolas"/>
-              </a:rPr>
-              <a:t>        }</a:t>
+                  <a:srgbClr val="EEFFFF"/>
+                </a:solidFill>
+                <a:latin typeface="Consolas"/>
+              </a:rPr>
+              <a:t>            </a:t>
+            </a:r>
+            <a:r>
+              <a:rPr sz="1600">
+                <a:solidFill>
+                  <a:srgbClr val="82AAFF"/>
+                </a:solidFill>
+                <a:latin typeface="Consolas"/>
+              </a:rPr>
+              <a:t>println!</a:t>
+            </a:r>
+            <a:r>
+              <a:rPr sz="1600">
+                <a:solidFill>
+                  <a:srgbClr val="BAC2DE"/>
+                </a:solidFill>
+                <a:latin typeface="Consolas"/>
+              </a:rPr>
+              <a:t>(</a:t>
+            </a:r>
+            <a:r>
+              <a:rPr sz="1600">
+                <a:solidFill>
+                  <a:srgbClr val="C3E88D"/>
+                </a:solidFill>
+                <a:latin typeface="Consolas"/>
+              </a:rPr>
+              <a:t>"</a:t>
+            </a:r>
+            <a:r>
+              <a:rPr sz="1600">
+                <a:solidFill>
+                  <a:srgbClr val="C3E88D"/>
+                </a:solidFill>
+                <a:latin typeface="Consolas"/>
+              </a:rPr>
+              <a:t>[ServoPlayerEsp] hold for {ms}ms</a:t>
+            </a:r>
+            <a:r>
+              <a:rPr sz="1600">
+                <a:solidFill>
+                  <a:srgbClr val="C3E88D"/>
+                </a:solidFill>
+                <a:latin typeface="Consolas"/>
+              </a:rPr>
+              <a:t>"</a:t>
+            </a:r>
+            <a:r>
+              <a:rPr sz="1600">
+                <a:solidFill>
+                  <a:srgbClr val="BAC2DE"/>
+                </a:solidFill>
+                <a:latin typeface="Consolas"/>
+              </a:rPr>
+              <a:t>)</a:t>
+            </a:r>
+            <a:r>
+              <a:rPr sz="1600">
+                <a:solidFill>
+                  <a:srgbClr val="BAC2DE"/>
+                </a:solidFill>
+                <a:latin typeface="Consolas"/>
+              </a:rPr>
+              <a:t>;</a:t>
             </a:r>
           </a:p>
           <a:p>
@@ -5120,11 +5963,128 @@
             <a:r>
               <a:rPr sz="1600">
                 <a:solidFill>
-                  <a:srgbClr val="DCDCDC"/>
-                </a:solidFill>
-                <a:latin typeface="Consolas"/>
-              </a:rPr>
-              <a:t>    }</a:t>
+                  <a:srgbClr val="EEFFFF"/>
+                </a:solidFill>
+                <a:latin typeface="Consolas"/>
+              </a:rPr>
+              <a:t>            </a:t>
+            </a:r>
+            <a:r>
+              <a:rPr sz="1600">
+                <a:solidFill>
+                  <a:srgbClr val="EEFFFF"/>
+                </a:solidFill>
+                <a:latin typeface="Consolas"/>
+              </a:rPr>
+              <a:t>thread</a:t>
+            </a:r>
+            <a:r>
+              <a:rPr sz="1600">
+                <a:solidFill>
+                  <a:srgbClr val="BAC2DE"/>
+                </a:solidFill>
+                <a:latin typeface="Consolas"/>
+              </a:rPr>
+              <a:t>::</a:t>
+            </a:r>
+            <a:r>
+              <a:rPr sz="1600">
+                <a:solidFill>
+                  <a:srgbClr val="EEFFFF"/>
+                </a:solidFill>
+                <a:latin typeface="Consolas"/>
+              </a:rPr>
+              <a:t>sleep</a:t>
+            </a:r>
+            <a:r>
+              <a:rPr sz="1600">
+                <a:solidFill>
+                  <a:srgbClr val="BAC2DE"/>
+                </a:solidFill>
+                <a:latin typeface="Consolas"/>
+              </a:rPr>
+              <a:t>(</a:t>
+            </a:r>
+            <a:r>
+              <a:rPr sz="1600">
+                <a:solidFill>
+                  <a:srgbClr val="EEFFFF"/>
+                </a:solidFill>
+                <a:latin typeface="Consolas"/>
+              </a:rPr>
+              <a:t>Duration</a:t>
+            </a:r>
+            <a:r>
+              <a:rPr sz="1600">
+                <a:solidFill>
+                  <a:srgbClr val="BAC2DE"/>
+                </a:solidFill>
+                <a:latin typeface="Consolas"/>
+              </a:rPr>
+              <a:t>::</a:t>
+            </a:r>
+            <a:r>
+              <a:rPr sz="1600">
+                <a:solidFill>
+                  <a:srgbClr val="EEFFFF"/>
+                </a:solidFill>
+                <a:latin typeface="Consolas"/>
+              </a:rPr>
+              <a:t>from_millis</a:t>
+            </a:r>
+            <a:r>
+              <a:rPr sz="1600">
+                <a:solidFill>
+                  <a:srgbClr val="BAC2DE"/>
+                </a:solidFill>
+                <a:latin typeface="Consolas"/>
+              </a:rPr>
+              <a:t>(</a:t>
+            </a:r>
+            <a:r>
+              <a:rPr sz="1600">
+                <a:solidFill>
+                  <a:srgbClr val="89DDFF"/>
+                </a:solidFill>
+                <a:latin typeface="Consolas"/>
+              </a:rPr>
+              <a:t>*</a:t>
+            </a:r>
+            <a:r>
+              <a:rPr sz="1600">
+                <a:solidFill>
+                  <a:srgbClr val="EEFFFF"/>
+                </a:solidFill>
+                <a:latin typeface="Consolas"/>
+              </a:rPr>
+              <a:t>ms</a:t>
+            </a:r>
+            <a:r>
+              <a:rPr sz="1600">
+                <a:solidFill>
+                  <a:srgbClr val="BAC2DE"/>
+                </a:solidFill>
+                <a:latin typeface="Consolas"/>
+              </a:rPr>
+              <a:t>)</a:t>
+            </a:r>
+            <a:r>
+              <a:rPr sz="1600">
+                <a:solidFill>
+                  <a:srgbClr val="BAC2DE"/>
+                </a:solidFill>
+                <a:latin typeface="Consolas"/>
+              </a:rPr>
+              <a:t>)</a:t>
+            </a:r>
+            <a:r>
+              <a:rPr sz="1600">
+                <a:solidFill>
+                  <a:srgbClr val="BAC2DE"/>
+                </a:solidFill>
+                <a:latin typeface="Consolas"/>
+              </a:rPr>
+              <a:t>;</a:t>
             </a:r>
           </a:p>
           <a:p>
@@ -5142,7 +6102,16 @@
             <a:r>
               <a:rPr sz="1600">
                 <a:solidFill>
-                  <a:srgbClr val="DCDCDC"/>
+                  <a:srgbClr val="EEFFFF"/>
+                </a:solidFill>
+                <a:latin typeface="Consolas"/>
+              </a:rPr>
+              <a:t>        </a:t>
+            </a:r>
+            <a:r>
+              <a:rPr sz="1600">
+                <a:solidFill>
+                  <a:srgbClr val="BAC2DE"/>
                 </a:solidFill>
                 <a:latin typeface="Consolas"/>
               </a:rPr>
@@ -5161,12 +6130,24 @@
                 <a:spcPts val="0"/>
               </a:spcAft>
             </a:pPr>
-            <a:endParaRPr sz="1600">
-              <a:solidFill>
-                <a:srgbClr val="DCDCDC"/>
-              </a:solidFill>
-              <a:latin typeface="Consolas"/>
-            </a:endParaRPr>
+            <a:r>
+              <a:rPr sz="1600">
+                <a:solidFill>
+                  <a:srgbClr val="EEFFFF"/>
+                </a:solidFill>
+                <a:latin typeface="Consolas"/>
+              </a:rPr>
+              <a:t>    </a:t>
+            </a:r>
+            <a:r>
+              <a:rPr sz="1600">
+                <a:solidFill>
+                  <a:srgbClr val="BAC2DE"/>
+                </a:solidFill>
+                <a:latin typeface="Consolas"/>
+              </a:rPr>
+              <a:t>}</a:t>
+            </a:r>
           </a:p>
           <a:p>
             <a:pPr>
@@ -5183,11 +6164,11 @@
             <a:r>
               <a:rPr sz="1600">
                 <a:solidFill>
-                  <a:srgbClr val="6A9955"/>
-                </a:solidFill>
-                <a:latin typeface="Consolas"/>
-              </a:rPr>
-              <a:t>// Generic program that only needs a `Servo`.</a:t>
+                  <a:srgbClr val="BAC2DE"/>
+                </a:solidFill>
+                <a:latin typeface="Consolas"/>
+              </a:rPr>
+              <a:t>}</a:t>
             </a:r>
           </a:p>
           <a:p>
@@ -5202,69 +6183,6 @@
                 <a:spcPts val="0"/>
               </a:spcAft>
             </a:pPr>
-            <a:r>
-              <a:rPr sz="1600">
-                <a:solidFill>
-                  <a:srgbClr val="C586C0"/>
-                </a:solidFill>
-                <a:latin typeface="Consolas"/>
-              </a:rPr>
-              <a:t>fn</a:t>
-            </a:r>
-            <a:r>
-              <a:rPr sz="1600">
-                <a:solidFill>
-                  <a:srgbClr val="DCDCDC"/>
-                </a:solidFill>
-                <a:latin typeface="Consolas"/>
-              </a:rPr>
-              <a:t> </a:t>
-            </a:r>
-            <a:r>
-              <a:rPr sz="1600">
-                <a:solidFill>
-                  <a:srgbClr val="DCDCAA"/>
-                </a:solidFill>
-                <a:latin typeface="Consolas"/>
-              </a:rPr>
-              <a:t>center_servo</a:t>
-            </a:r>
-            <a:r>
-              <a:rPr sz="1600">
-                <a:solidFill>
-                  <a:srgbClr val="DCDCDC"/>
-                </a:solidFill>
-                <a:latin typeface="Consolas"/>
-              </a:rPr>
-              <a:t>(servo: </a:t>
-            </a:r>
-            <a:r>
-              <a:rPr sz="1600">
-                <a:solidFill>
-                  <a:srgbClr val="C586C0"/>
-                </a:solidFill>
-                <a:latin typeface="Consolas"/>
-              </a:rPr>
-              <a:t>&amp;</a:t>
-            </a:r>
-            <a:r>
-              <a:rPr sz="1600">
-                <a:solidFill>
-                  <a:srgbClr val="4EC9B0"/>
-                </a:solidFill>
-                <a:latin typeface="Consolas"/>
-              </a:rPr>
-              <a:t>impl</a:t>
-            </a:r>
-            <a:r>
-              <a:rPr sz="1600">
-                <a:solidFill>
-                  <a:srgbClr val="DCDCDC"/>
-                </a:solidFill>
-                <a:latin typeface="Consolas"/>
-              </a:rPr>
-              <a:t> Servo) {</a:t>
-            </a:r>
           </a:p>
           <a:p>
             <a:pPr>
@@ -5281,29 +6199,11 @@
             <a:r>
               <a:rPr sz="1600">
                 <a:solidFill>
-                  <a:srgbClr val="DCDCDC"/>
-                </a:solidFill>
-                <a:latin typeface="Consolas"/>
-              </a:rPr>
-              <a:t>    servo.set_degrees(</a:t>
-            </a:r>
-            <a:r>
-              <a:rPr sz="1600">
-                <a:solidFill>
-                  <a:srgbClr val="B5CEA8"/>
-                </a:solidFill>
-                <a:latin typeface="Consolas"/>
-              </a:rPr>
-              <a:t>90</a:t>
-            </a:r>
-            <a:r>
-              <a:rPr sz="1600">
-                <a:solidFill>
-                  <a:srgbClr val="DCDCDC"/>
-                </a:solidFill>
-                <a:latin typeface="Consolas"/>
-              </a:rPr>
-              <a:t>);</a:t>
+                  <a:srgbClr val="6A9955"/>
+                </a:solidFill>
+                <a:latin typeface="Consolas"/>
+              </a:rPr>
+              <a:t>// Generic program that only needs a `Servo`.</a:t>
             </a:r>
           </a:p>
           <a:p>
@@ -5321,11 +6221,128 @@
             <a:r>
               <a:rPr sz="1600">
                 <a:solidFill>
-                  <a:srgbClr val="DCDCDC"/>
-                </a:solidFill>
-                <a:latin typeface="Consolas"/>
-              </a:rPr>
-              <a:t>}</a:t>
+                  <a:srgbClr val="C792EA"/>
+                </a:solidFill>
+                <a:latin typeface="Consolas"/>
+              </a:rPr>
+              <a:t>fn</a:t>
+            </a:r>
+            <a:r>
+              <a:rPr sz="1600">
+                <a:solidFill>
+                  <a:srgbClr val="EEFFFF"/>
+                </a:solidFill>
+                <a:latin typeface="Consolas"/>
+              </a:rPr>
+              <a:t> </a:t>
+            </a:r>
+            <a:r>
+              <a:rPr sz="1600">
+                <a:solidFill>
+                  <a:srgbClr val="82AAFF"/>
+                </a:solidFill>
+                <a:latin typeface="Consolas"/>
+              </a:rPr>
+              <a:t>center_servo</a:t>
+            </a:r>
+            <a:r>
+              <a:rPr sz="1600">
+                <a:solidFill>
+                  <a:srgbClr val="BAC2DE"/>
+                </a:solidFill>
+                <a:latin typeface="Consolas"/>
+              </a:rPr>
+              <a:t>(</a:t>
+            </a:r>
+            <a:r>
+              <a:rPr sz="1600">
+                <a:solidFill>
+                  <a:srgbClr val="EEFFFF"/>
+                </a:solidFill>
+                <a:latin typeface="Consolas"/>
+              </a:rPr>
+              <a:t>servo</a:t>
+            </a:r>
+            <a:r>
+              <a:rPr sz="1600">
+                <a:solidFill>
+                  <a:srgbClr val="BAC2DE"/>
+                </a:solidFill>
+                <a:latin typeface="Consolas"/>
+              </a:rPr>
+              <a:t>:</a:t>
+            </a:r>
+            <a:r>
+              <a:rPr sz="1600">
+                <a:solidFill>
+                  <a:srgbClr val="EEFFFF"/>
+                </a:solidFill>
+                <a:latin typeface="Consolas"/>
+              </a:rPr>
+              <a:t> </a:t>
+            </a:r>
+            <a:r>
+              <a:rPr sz="1600">
+                <a:solidFill>
+                  <a:srgbClr val="C792EA"/>
+                </a:solidFill>
+                <a:latin typeface="Consolas"/>
+              </a:rPr>
+              <a:t>&amp;</a:t>
+            </a:r>
+            <a:r>
+              <a:rPr sz="1600">
+                <a:solidFill>
+                  <a:srgbClr val="FFCB6B"/>
+                </a:solidFill>
+                <a:latin typeface="Consolas"/>
+              </a:rPr>
+              <a:t>impl</a:t>
+            </a:r>
+            <a:r>
+              <a:rPr sz="1600">
+                <a:solidFill>
+                  <a:srgbClr val="EEFFFF"/>
+                </a:solidFill>
+                <a:latin typeface="Consolas"/>
+              </a:rPr>
+              <a:t> </a:t>
+            </a:r>
+            <a:r>
+              <a:rPr sz="1600">
+                <a:solidFill>
+                  <a:srgbClr val="EEFFFF"/>
+                </a:solidFill>
+                <a:latin typeface="Consolas"/>
+              </a:rPr>
+              <a:t>Servo</a:t>
+            </a:r>
+            <a:r>
+              <a:rPr sz="1600">
+                <a:solidFill>
+                  <a:srgbClr val="BAC2DE"/>
+                </a:solidFill>
+                <a:latin typeface="Consolas"/>
+              </a:rPr>
+              <a:t>)</a:t>
+            </a:r>
+            <a:r>
+              <a:rPr sz="1600">
+                <a:solidFill>
+                  <a:srgbClr val="EEFFFF"/>
+                </a:solidFill>
+                <a:latin typeface="Consolas"/>
+              </a:rPr>
+              <a:t> </a:t>
+            </a:r>
+            <a:r>
+              <a:rPr sz="1600">
+                <a:solidFill>
+                  <a:srgbClr val="BAC2DE"/>
+                </a:solidFill>
+                <a:latin typeface="Consolas"/>
+              </a:rPr>
+              <a:t>{</a:t>
             </a:r>
           </a:p>
           <a:p>
@@ -5340,12 +6357,78 @@
                 <a:spcPts val="0"/>
               </a:spcAft>
             </a:pPr>
-            <a:endParaRPr sz="1600">
-              <a:solidFill>
-                <a:srgbClr val="DCDCDC"/>
-              </a:solidFill>
-              <a:latin typeface="Consolas"/>
-            </a:endParaRPr>
+            <a:r>
+              <a:rPr sz="1600">
+                <a:solidFill>
+                  <a:srgbClr val="EEFFFF"/>
+                </a:solidFill>
+                <a:latin typeface="Consolas"/>
+              </a:rPr>
+              <a:t>    </a:t>
+            </a:r>
+            <a:r>
+              <a:rPr sz="1600">
+                <a:solidFill>
+                  <a:srgbClr val="EEFFFF"/>
+                </a:solidFill>
+                <a:latin typeface="Consolas"/>
+              </a:rPr>
+              <a:t>servo</a:t>
+            </a:r>
+            <a:r>
+              <a:rPr sz="1600">
+                <a:solidFill>
+                  <a:srgbClr val="BAC2DE"/>
+                </a:solidFill>
+                <a:latin typeface="Consolas"/>
+              </a:rPr>
+              <a:t>.</a:t>
+            </a:r>
+            <a:r>
+              <a:rPr sz="1600">
+                <a:solidFill>
+                  <a:srgbClr val="EEFFFF"/>
+                </a:solidFill>
+                <a:latin typeface="Consolas"/>
+              </a:rPr>
+              <a:t>set_degrees</a:t>
+            </a:r>
+            <a:r>
+              <a:rPr sz="1600">
+                <a:solidFill>
+                  <a:srgbClr val="BAC2DE"/>
+                </a:solidFill>
+                <a:latin typeface="Consolas"/>
+              </a:rPr>
+              <a:t>(</a:t>
+            </a:r>
+            <a:r>
+              <a:rPr sz="1600">
+                <a:solidFill>
+                  <a:srgbClr val="F78C6C"/>
+                </a:solidFill>
+                <a:latin typeface="Consolas"/>
+              </a:rPr>
+              <a:t>90</a:t>
+            </a:r>
+            <a:r>
+              <a:rPr sz="1600">
+                <a:solidFill>
+                  <a:srgbClr val="BAC2DE"/>
+                </a:solidFill>
+                <a:latin typeface="Consolas"/>
+              </a:rPr>
+              <a:t>)</a:t>
+            </a:r>
+            <a:r>
+              <a:rPr sz="1600">
+                <a:solidFill>
+                  <a:srgbClr val="BAC2DE"/>
+                </a:solidFill>
+                <a:latin typeface="Consolas"/>
+              </a:rPr>
+              <a:t>;</a:t>
+            </a:r>
           </a:p>
           <a:p>
             <a:pPr>
@@ -5362,11 +6445,11 @@
             <a:r>
               <a:rPr sz="1600">
                 <a:solidFill>
-                  <a:srgbClr val="6A9955"/>
-                </a:solidFill>
-                <a:latin typeface="Consolas"/>
-              </a:rPr>
-              <a:t>// Generic program that needs a `ServoPlayer`.</a:t>
+                  <a:srgbClr val="BAC2DE"/>
+                </a:solidFill>
+                <a:latin typeface="Consolas"/>
+              </a:rPr>
+              <a:t>}</a:t>
             </a:r>
           </a:p>
           <a:p>
@@ -5381,69 +6464,6 @@
                 <a:spcPts val="0"/>
               </a:spcAft>
             </a:pPr>
-            <a:r>
-              <a:rPr sz="1600">
-                <a:solidFill>
-                  <a:srgbClr val="C586C0"/>
-                </a:solidFill>
-                <a:latin typeface="Consolas"/>
-              </a:rPr>
-              <a:t>fn</a:t>
-            </a:r>
-            <a:r>
-              <a:rPr sz="1600">
-                <a:solidFill>
-                  <a:srgbClr val="DCDCDC"/>
-                </a:solidFill>
-                <a:latin typeface="Consolas"/>
-              </a:rPr>
-              <a:t> </a:t>
-            </a:r>
-            <a:r>
-              <a:rPr sz="1600">
-                <a:solidFill>
-                  <a:srgbClr val="DCDCAA"/>
-                </a:solidFill>
-                <a:latin typeface="Consolas"/>
-              </a:rPr>
-              <a:t>run_wave</a:t>
-            </a:r>
-            <a:r>
-              <a:rPr sz="1600">
-                <a:solidFill>
-                  <a:srgbClr val="DCDCDC"/>
-                </a:solidFill>
-                <a:latin typeface="Consolas"/>
-              </a:rPr>
-              <a:t>(player: </a:t>
-            </a:r>
-            <a:r>
-              <a:rPr sz="1600">
-                <a:solidFill>
-                  <a:srgbClr val="C586C0"/>
-                </a:solidFill>
-                <a:latin typeface="Consolas"/>
-              </a:rPr>
-              <a:t>&amp;</a:t>
-            </a:r>
-            <a:r>
-              <a:rPr sz="1600">
-                <a:solidFill>
-                  <a:srgbClr val="4EC9B0"/>
-                </a:solidFill>
-                <a:latin typeface="Consolas"/>
-              </a:rPr>
-              <a:t>impl</a:t>
-            </a:r>
-            <a:r>
-              <a:rPr sz="1600">
-                <a:solidFill>
-                  <a:srgbClr val="DCDCDC"/>
-                </a:solidFill>
-                <a:latin typeface="Consolas"/>
-              </a:rPr>
-              <a:t> ServoPlayer) {</a:t>
-            </a:r>
           </a:p>
           <a:p>
             <a:pPr>
@@ -5460,11 +6480,11 @@
             <a:r>
               <a:rPr sz="1600">
                 <a:solidFill>
-                  <a:srgbClr val="DCDCDC"/>
-                </a:solidFill>
-                <a:latin typeface="Consolas"/>
-              </a:rPr>
-              <a:t>    player.animate(&amp;[</a:t>
+                  <a:srgbClr val="6A9955"/>
+                </a:solidFill>
+                <a:latin typeface="Consolas"/>
+              </a:rPr>
+              <a:t>// Generic program that needs a `ServoPlayer`.</a:t>
             </a:r>
           </a:p>
           <a:p>
@@ -5482,47 +6502,128 @@
             <a:r>
               <a:rPr sz="1600">
                 <a:solidFill>
-                  <a:srgbClr val="DCDCDC"/>
-                </a:solidFill>
-                <a:latin typeface="Consolas"/>
-              </a:rPr>
-              <a:t>        (</a:t>
-            </a:r>
-            <a:r>
-              <a:rPr sz="1600">
-                <a:solidFill>
-                  <a:srgbClr val="B5CEA8"/>
-                </a:solidFill>
-                <a:latin typeface="Consolas"/>
-              </a:rPr>
-              <a:t>0</a:t>
-            </a:r>
-            <a:r>
-              <a:rPr sz="1600">
-                <a:solidFill>
-                  <a:srgbClr val="DCDCDC"/>
-                </a:solidFill>
-                <a:latin typeface="Consolas"/>
-              </a:rPr>
-              <a:t>, </a:t>
-            </a:r>
-            <a:r>
-              <a:rPr sz="1600">
-                <a:solidFill>
-                  <a:srgbClr val="B5CEA8"/>
-                </a:solidFill>
-                <a:latin typeface="Consolas"/>
-              </a:rPr>
-              <a:t>120</a:t>
-            </a:r>
-            <a:r>
-              <a:rPr sz="1600">
-                <a:solidFill>
-                  <a:srgbClr val="DCDCDC"/>
-                </a:solidFill>
-                <a:latin typeface="Consolas"/>
-              </a:rPr>
-              <a:t>),</a:t>
+                  <a:srgbClr val="C792EA"/>
+                </a:solidFill>
+                <a:latin typeface="Consolas"/>
+              </a:rPr>
+              <a:t>fn</a:t>
+            </a:r>
+            <a:r>
+              <a:rPr sz="1600">
+                <a:solidFill>
+                  <a:srgbClr val="EEFFFF"/>
+                </a:solidFill>
+                <a:latin typeface="Consolas"/>
+              </a:rPr>
+              <a:t> </a:t>
+            </a:r>
+            <a:r>
+              <a:rPr sz="1600">
+                <a:solidFill>
+                  <a:srgbClr val="82AAFF"/>
+                </a:solidFill>
+                <a:latin typeface="Consolas"/>
+              </a:rPr>
+              <a:t>run_wave</a:t>
+            </a:r>
+            <a:r>
+              <a:rPr sz="1600">
+                <a:solidFill>
+                  <a:srgbClr val="BAC2DE"/>
+                </a:solidFill>
+                <a:latin typeface="Consolas"/>
+              </a:rPr>
+              <a:t>(</a:t>
+            </a:r>
+            <a:r>
+              <a:rPr sz="1600">
+                <a:solidFill>
+                  <a:srgbClr val="EEFFFF"/>
+                </a:solidFill>
+                <a:latin typeface="Consolas"/>
+              </a:rPr>
+              <a:t>player</a:t>
+            </a:r>
+            <a:r>
+              <a:rPr sz="1600">
+                <a:solidFill>
+                  <a:srgbClr val="BAC2DE"/>
+                </a:solidFill>
+                <a:latin typeface="Consolas"/>
+              </a:rPr>
+              <a:t>:</a:t>
+            </a:r>
+            <a:r>
+              <a:rPr sz="1600">
+                <a:solidFill>
+                  <a:srgbClr val="EEFFFF"/>
+                </a:solidFill>
+                <a:latin typeface="Consolas"/>
+              </a:rPr>
+              <a:t> </a:t>
+            </a:r>
+            <a:r>
+              <a:rPr sz="1600">
+                <a:solidFill>
+                  <a:srgbClr val="C792EA"/>
+                </a:solidFill>
+                <a:latin typeface="Consolas"/>
+              </a:rPr>
+              <a:t>&amp;</a:t>
+            </a:r>
+            <a:r>
+              <a:rPr sz="1600">
+                <a:solidFill>
+                  <a:srgbClr val="FFCB6B"/>
+                </a:solidFill>
+                <a:latin typeface="Consolas"/>
+              </a:rPr>
+              <a:t>impl</a:t>
+            </a:r>
+            <a:r>
+              <a:rPr sz="1600">
+                <a:solidFill>
+                  <a:srgbClr val="EEFFFF"/>
+                </a:solidFill>
+                <a:latin typeface="Consolas"/>
+              </a:rPr>
+              <a:t> </a:t>
+            </a:r>
+            <a:r>
+              <a:rPr sz="1600">
+                <a:solidFill>
+                  <a:srgbClr val="EEFFFF"/>
+                </a:solidFill>
+                <a:latin typeface="Consolas"/>
+              </a:rPr>
+              <a:t>ServoPlayer</a:t>
+            </a:r>
+            <a:r>
+              <a:rPr sz="1600">
+                <a:solidFill>
+                  <a:srgbClr val="BAC2DE"/>
+                </a:solidFill>
+                <a:latin typeface="Consolas"/>
+              </a:rPr>
+              <a:t>)</a:t>
+            </a:r>
+            <a:r>
+              <a:rPr sz="1600">
+                <a:solidFill>
+                  <a:srgbClr val="EEFFFF"/>
+                </a:solidFill>
+                <a:latin typeface="Consolas"/>
+              </a:rPr>
+              <a:t> </a:t>
+            </a:r>
+            <a:r>
+              <a:rPr sz="1600">
+                <a:solidFill>
+                  <a:srgbClr val="BAC2DE"/>
+                </a:solidFill>
+                <a:latin typeface="Consolas"/>
+              </a:rPr>
+              <a:t>{</a:t>
             </a:r>
           </a:p>
         </p:txBody>
@@ -5536,7 +6637,7 @@
 </file>
 
 <file path=ppt/slides/slide4.xml><?xml version="1.0" encoding="utf-8"?>
-<p:sld xmlns:a="http://schemas.openxmlformats.org/drawingml/2006/main" xmlns:r="http://schemas.openxmlformats.org/officeDocument/2006/relationships" xmlns:p="http://schemas.openxmlformats.org/presentationml/2006/main">
+<p:sld xmlns:a="http://schemas.openxmlformats.org/drawingml/2006/main" xmlns:p="http://schemas.openxmlformats.org/presentationml/2006/main" xmlns:r="http://schemas.openxmlformats.org/officeDocument/2006/relationships">
   <p:cSld>
     <p:spTree>
       <p:nvGrpSpPr>
@@ -5544,14 +6645,7 @@
         <p:cNvGrpSpPr/>
         <p:nvPr/>
       </p:nvGrpSpPr>
-      <p:grpSpPr>
-        <a:xfrm>
-          <a:off x="0" y="0"/>
-          <a:ext cx="0" cy="0"/>
-          <a:chOff x="0" y="0"/>
-          <a:chExt cx="0" cy="0"/>
-        </a:xfrm>
-      </p:grpSpPr>
+      <p:grpSpPr/>
       <p:sp>
         <p:nvSpPr>
           <p:cNvPr id="2" name="Rectangle 1"/>
@@ -5592,7 +6686,6 @@
           <a:lstStyle/>
           <a:p>
             <a:pPr algn="ctr"/>
-            <a:endParaRPr/>
           </a:p>
         </p:txBody>
       </p:sp>
@@ -5613,8 +6706,8 @@
           <a:noFill/>
         </p:spPr>
         <p:txBody>
-          <a:bodyPr wrap="none">
-            <a:spAutoFit/>
+          <a:bodyPr wrap="square">
+            <a:noAutofit/>
           </a:bodyPr>
           <a:lstStyle/>
           <a:p>
@@ -5632,47 +6725,65 @@
             <a:r>
               <a:rPr sz="1600">
                 <a:solidFill>
-                  <a:srgbClr val="DCDCDC"/>
-                </a:solidFill>
-                <a:latin typeface="Consolas"/>
-              </a:rPr>
-              <a:t>        (</a:t>
-            </a:r>
-            <a:r>
-              <a:rPr sz="1600">
-                <a:solidFill>
-                  <a:srgbClr val="B5CEA8"/>
-                </a:solidFill>
-                <a:latin typeface="Consolas"/>
-              </a:rPr>
-              <a:t>45</a:t>
-            </a:r>
-            <a:r>
-              <a:rPr sz="1600">
-                <a:solidFill>
-                  <a:srgbClr val="DCDCDC"/>
-                </a:solidFill>
-                <a:latin typeface="Consolas"/>
-              </a:rPr>
-              <a:t>, </a:t>
-            </a:r>
-            <a:r>
-              <a:rPr sz="1600">
-                <a:solidFill>
-                  <a:srgbClr val="B5CEA8"/>
-                </a:solidFill>
-                <a:latin typeface="Consolas"/>
-              </a:rPr>
-              <a:t>100</a:t>
-            </a:r>
-            <a:r>
-              <a:rPr sz="1600">
-                <a:solidFill>
-                  <a:srgbClr val="DCDCDC"/>
-                </a:solidFill>
-                <a:latin typeface="Consolas"/>
-              </a:rPr>
-              <a:t>),</a:t>
+                  <a:srgbClr val="EEFFFF"/>
+                </a:solidFill>
+                <a:latin typeface="Consolas"/>
+              </a:rPr>
+              <a:t>    </a:t>
+            </a:r>
+            <a:r>
+              <a:rPr sz="1600">
+                <a:solidFill>
+                  <a:srgbClr val="EEFFFF"/>
+                </a:solidFill>
+                <a:latin typeface="Consolas"/>
+              </a:rPr>
+              <a:t>player</a:t>
+            </a:r>
+            <a:r>
+              <a:rPr sz="1600">
+                <a:solidFill>
+                  <a:srgbClr val="BAC2DE"/>
+                </a:solidFill>
+                <a:latin typeface="Consolas"/>
+              </a:rPr>
+              <a:t>.</a:t>
+            </a:r>
+            <a:r>
+              <a:rPr sz="1600">
+                <a:solidFill>
+                  <a:srgbClr val="EEFFFF"/>
+                </a:solidFill>
+                <a:latin typeface="Consolas"/>
+              </a:rPr>
+              <a:t>animate</a:t>
+            </a:r>
+            <a:r>
+              <a:rPr sz="1600">
+                <a:solidFill>
+                  <a:srgbClr val="BAC2DE"/>
+                </a:solidFill>
+                <a:latin typeface="Consolas"/>
+              </a:rPr>
+              <a:t>(</a:t>
+            </a:r>
+            <a:r>
+              <a:rPr sz="1600">
+                <a:solidFill>
+                  <a:srgbClr val="89DDFF"/>
+                </a:solidFill>
+                <a:latin typeface="Consolas"/>
+              </a:rPr>
+              <a:t>&amp;</a:t>
+            </a:r>
+            <a:r>
+              <a:rPr sz="1600">
+                <a:solidFill>
+                  <a:srgbClr val="BAC2DE"/>
+                </a:solidFill>
+                <a:latin typeface="Consolas"/>
+              </a:rPr>
+              <a:t>[</a:t>
             </a:r>
           </a:p>
           <a:p>
@@ -5690,47 +6801,74 @@
             <a:r>
               <a:rPr sz="1600">
                 <a:solidFill>
-                  <a:srgbClr val="DCDCDC"/>
-                </a:solidFill>
-                <a:latin typeface="Consolas"/>
-              </a:rPr>
-              <a:t>        (</a:t>
-            </a:r>
-            <a:r>
-              <a:rPr sz="1600">
-                <a:solidFill>
-                  <a:srgbClr val="B5CEA8"/>
-                </a:solidFill>
-                <a:latin typeface="Consolas"/>
-              </a:rPr>
-              <a:t>90</a:t>
-            </a:r>
-            <a:r>
-              <a:rPr sz="1600">
-                <a:solidFill>
-                  <a:srgbClr val="DCDCDC"/>
-                </a:solidFill>
-                <a:latin typeface="Consolas"/>
-              </a:rPr>
-              <a:t>, </a:t>
-            </a:r>
-            <a:r>
-              <a:rPr sz="1600">
-                <a:solidFill>
-                  <a:srgbClr val="B5CEA8"/>
-                </a:solidFill>
-                <a:latin typeface="Consolas"/>
-              </a:rPr>
-              <a:t>100</a:t>
-            </a:r>
-            <a:r>
-              <a:rPr sz="1600">
-                <a:solidFill>
-                  <a:srgbClr val="DCDCDC"/>
-                </a:solidFill>
-                <a:latin typeface="Consolas"/>
-              </a:rPr>
-              <a:t>),</a:t>
+                  <a:srgbClr val="EEFFFF"/>
+                </a:solidFill>
+                <a:latin typeface="Consolas"/>
+              </a:rPr>
+              <a:t>        </a:t>
+            </a:r>
+            <a:r>
+              <a:rPr sz="1600">
+                <a:solidFill>
+                  <a:srgbClr val="BAC2DE"/>
+                </a:solidFill>
+                <a:latin typeface="Consolas"/>
+              </a:rPr>
+              <a:t>(</a:t>
+            </a:r>
+            <a:r>
+              <a:rPr sz="1600">
+                <a:solidFill>
+                  <a:srgbClr val="F78C6C"/>
+                </a:solidFill>
+                <a:latin typeface="Consolas"/>
+              </a:rPr>
+              <a:t>0</a:t>
+            </a:r>
+            <a:r>
+              <a:rPr sz="1600">
+                <a:solidFill>
+                  <a:srgbClr val="BAC2DE"/>
+                </a:solidFill>
+                <a:latin typeface="Consolas"/>
+              </a:rPr>
+              <a:t>,</a:t>
+            </a:r>
+            <a:r>
+              <a:rPr sz="1600">
+                <a:solidFill>
+                  <a:srgbClr val="EEFFFF"/>
+                </a:solidFill>
+                <a:latin typeface="Consolas"/>
+              </a:rPr>
+              <a:t> </a:t>
+            </a:r>
+            <a:r>
+              <a:rPr sz="1600">
+                <a:solidFill>
+                  <a:srgbClr val="F78C6C"/>
+                </a:solidFill>
+                <a:latin typeface="Consolas"/>
+              </a:rPr>
+              <a:t>120</a:t>
+            </a:r>
+            <a:r>
+              <a:rPr sz="1600">
+                <a:solidFill>
+                  <a:srgbClr val="BAC2DE"/>
+                </a:solidFill>
+                <a:latin typeface="Consolas"/>
+              </a:rPr>
+              <a:t>)</a:t>
+            </a:r>
+            <a:r>
+              <a:rPr sz="1600">
+                <a:solidFill>
+                  <a:srgbClr val="BAC2DE"/>
+                </a:solidFill>
+                <a:latin typeface="Consolas"/>
+              </a:rPr>
+              <a:t>,</a:t>
             </a:r>
           </a:p>
           <a:p>
@@ -5748,34 +6886,52 @@
             <a:r>
               <a:rPr sz="1600">
                 <a:solidFill>
-                  <a:srgbClr val="DCDCDC"/>
-                </a:solidFill>
-                <a:latin typeface="Consolas"/>
-              </a:rPr>
-              <a:t>        (</a:t>
-            </a:r>
-            <a:r>
-              <a:rPr sz="1600">
-                <a:solidFill>
-                  <a:srgbClr val="B5CEA8"/>
-                </a:solidFill>
-                <a:latin typeface="Consolas"/>
-              </a:rPr>
-              <a:t>135</a:t>
-            </a:r>
-            <a:r>
-              <a:rPr sz="1600">
-                <a:solidFill>
-                  <a:srgbClr val="DCDCDC"/>
-                </a:solidFill>
-                <a:latin typeface="Consolas"/>
-              </a:rPr>
-              <a:t>, </a:t>
-            </a:r>
-            <a:r>
-              <a:rPr sz="1600">
-                <a:solidFill>
-                  <a:srgbClr val="B5CEA8"/>
+                  <a:srgbClr val="EEFFFF"/>
+                </a:solidFill>
+                <a:latin typeface="Consolas"/>
+              </a:rPr>
+              <a:t>        </a:t>
+            </a:r>
+            <a:r>
+              <a:rPr sz="1600">
+                <a:solidFill>
+                  <a:srgbClr val="BAC2DE"/>
+                </a:solidFill>
+                <a:latin typeface="Consolas"/>
+              </a:rPr>
+              <a:t>(</a:t>
+            </a:r>
+            <a:r>
+              <a:rPr sz="1600">
+                <a:solidFill>
+                  <a:srgbClr val="F78C6C"/>
+                </a:solidFill>
+                <a:latin typeface="Consolas"/>
+              </a:rPr>
+              <a:t>45</a:t>
+            </a:r>
+            <a:r>
+              <a:rPr sz="1600">
+                <a:solidFill>
+                  <a:srgbClr val="BAC2DE"/>
+                </a:solidFill>
+                <a:latin typeface="Consolas"/>
+              </a:rPr>
+              <a:t>,</a:t>
+            </a:r>
+            <a:r>
+              <a:rPr sz="1600">
+                <a:solidFill>
+                  <a:srgbClr val="EEFFFF"/>
+                </a:solidFill>
+                <a:latin typeface="Consolas"/>
+              </a:rPr>
+              <a:t> </a:t>
+            </a:r>
+            <a:r>
+              <a:rPr sz="1600">
+                <a:solidFill>
+                  <a:srgbClr val="F78C6C"/>
                 </a:solidFill>
                 <a:latin typeface="Consolas"/>
               </a:rPr>
@@ -5784,11 +6940,20 @@
             <a:r>
               <a:rPr sz="1600">
                 <a:solidFill>
-                  <a:srgbClr val="DCDCDC"/>
-                </a:solidFill>
-                <a:latin typeface="Consolas"/>
-              </a:rPr>
-              <a:t>),</a:t>
+                  <a:srgbClr val="BAC2DE"/>
+                </a:solidFill>
+                <a:latin typeface="Consolas"/>
+              </a:rPr>
+              <a:t>)</a:t>
+            </a:r>
+            <a:r>
+              <a:rPr sz="1600">
+                <a:solidFill>
+                  <a:srgbClr val="BAC2DE"/>
+                </a:solidFill>
+                <a:latin typeface="Consolas"/>
+              </a:rPr>
+              <a:t>,</a:t>
             </a:r>
           </a:p>
           <a:p>
@@ -5806,47 +6971,74 @@
             <a:r>
               <a:rPr sz="1600">
                 <a:solidFill>
-                  <a:srgbClr val="DCDCDC"/>
-                </a:solidFill>
-                <a:latin typeface="Consolas"/>
-              </a:rPr>
-              <a:t>        (</a:t>
-            </a:r>
-            <a:r>
-              <a:rPr sz="1600">
-                <a:solidFill>
-                  <a:srgbClr val="B5CEA8"/>
-                </a:solidFill>
-                <a:latin typeface="Consolas"/>
-              </a:rPr>
-              <a:t>180</a:t>
-            </a:r>
-            <a:r>
-              <a:rPr sz="1600">
-                <a:solidFill>
-                  <a:srgbClr val="DCDCDC"/>
-                </a:solidFill>
-                <a:latin typeface="Consolas"/>
-              </a:rPr>
-              <a:t>, </a:t>
-            </a:r>
-            <a:r>
-              <a:rPr sz="1600">
-                <a:solidFill>
-                  <a:srgbClr val="B5CEA8"/>
-                </a:solidFill>
-                <a:latin typeface="Consolas"/>
-              </a:rPr>
-              <a:t>120</a:t>
-            </a:r>
-            <a:r>
-              <a:rPr sz="1600">
-                <a:solidFill>
-                  <a:srgbClr val="DCDCDC"/>
-                </a:solidFill>
-                <a:latin typeface="Consolas"/>
-              </a:rPr>
-              <a:t>),</a:t>
+                  <a:srgbClr val="EEFFFF"/>
+                </a:solidFill>
+                <a:latin typeface="Consolas"/>
+              </a:rPr>
+              <a:t>        </a:t>
+            </a:r>
+            <a:r>
+              <a:rPr sz="1600">
+                <a:solidFill>
+                  <a:srgbClr val="BAC2DE"/>
+                </a:solidFill>
+                <a:latin typeface="Consolas"/>
+              </a:rPr>
+              <a:t>(</a:t>
+            </a:r>
+            <a:r>
+              <a:rPr sz="1600">
+                <a:solidFill>
+                  <a:srgbClr val="F78C6C"/>
+                </a:solidFill>
+                <a:latin typeface="Consolas"/>
+              </a:rPr>
+              <a:t>90</a:t>
+            </a:r>
+            <a:r>
+              <a:rPr sz="1600">
+                <a:solidFill>
+                  <a:srgbClr val="BAC2DE"/>
+                </a:solidFill>
+                <a:latin typeface="Consolas"/>
+              </a:rPr>
+              <a:t>,</a:t>
+            </a:r>
+            <a:r>
+              <a:rPr sz="1600">
+                <a:solidFill>
+                  <a:srgbClr val="EEFFFF"/>
+                </a:solidFill>
+                <a:latin typeface="Consolas"/>
+              </a:rPr>
+              <a:t> </a:t>
+            </a:r>
+            <a:r>
+              <a:rPr sz="1600">
+                <a:solidFill>
+                  <a:srgbClr val="F78C6C"/>
+                </a:solidFill>
+                <a:latin typeface="Consolas"/>
+              </a:rPr>
+              <a:t>100</a:t>
+            </a:r>
+            <a:r>
+              <a:rPr sz="1600">
+                <a:solidFill>
+                  <a:srgbClr val="BAC2DE"/>
+                </a:solidFill>
+                <a:latin typeface="Consolas"/>
+              </a:rPr>
+              <a:t>)</a:t>
+            </a:r>
+            <a:r>
+              <a:rPr sz="1600">
+                <a:solidFill>
+                  <a:srgbClr val="BAC2DE"/>
+                </a:solidFill>
+                <a:latin typeface="Consolas"/>
+              </a:rPr>
+              <a:t>,</a:t>
             </a:r>
           </a:p>
           <a:p>
@@ -5864,16 +7056,25 @@
             <a:r>
               <a:rPr sz="1600">
                 <a:solidFill>
-                  <a:srgbClr val="DCDCDC"/>
-                </a:solidFill>
-                <a:latin typeface="Consolas"/>
-              </a:rPr>
-              <a:t>        (</a:t>
-            </a:r>
-            <a:r>
-              <a:rPr sz="1600">
-                <a:solidFill>
-                  <a:srgbClr val="B5CEA8"/>
+                  <a:srgbClr val="EEFFFF"/>
+                </a:solidFill>
+                <a:latin typeface="Consolas"/>
+              </a:rPr>
+              <a:t>        </a:t>
+            </a:r>
+            <a:r>
+              <a:rPr sz="1600">
+                <a:solidFill>
+                  <a:srgbClr val="BAC2DE"/>
+                </a:solidFill>
+                <a:latin typeface="Consolas"/>
+              </a:rPr>
+              <a:t>(</a:t>
+            </a:r>
+            <a:r>
+              <a:rPr sz="1600">
+                <a:solidFill>
+                  <a:srgbClr val="F78C6C"/>
                 </a:solidFill>
                 <a:latin typeface="Consolas"/>
               </a:rPr>
@@ -5882,16 +7083,25 @@
             <a:r>
               <a:rPr sz="1600">
                 <a:solidFill>
-                  <a:srgbClr val="DCDCDC"/>
-                </a:solidFill>
-                <a:latin typeface="Consolas"/>
-              </a:rPr>
-              <a:t>, </a:t>
-            </a:r>
-            <a:r>
-              <a:rPr sz="1600">
-                <a:solidFill>
-                  <a:srgbClr val="B5CEA8"/>
+                  <a:srgbClr val="BAC2DE"/>
+                </a:solidFill>
+                <a:latin typeface="Consolas"/>
+              </a:rPr>
+              <a:t>,</a:t>
+            </a:r>
+            <a:r>
+              <a:rPr sz="1600">
+                <a:solidFill>
+                  <a:srgbClr val="EEFFFF"/>
+                </a:solidFill>
+                <a:latin typeface="Consolas"/>
+              </a:rPr>
+              <a:t> </a:t>
+            </a:r>
+            <a:r>
+              <a:rPr sz="1600">
+                <a:solidFill>
+                  <a:srgbClr val="F78C6C"/>
                 </a:solidFill>
                 <a:latin typeface="Consolas"/>
               </a:rPr>
@@ -5900,11 +7110,20 @@
             <a:r>
               <a:rPr sz="1600">
                 <a:solidFill>
-                  <a:srgbClr val="DCDCDC"/>
-                </a:solidFill>
-                <a:latin typeface="Consolas"/>
-              </a:rPr>
-              <a:t>),</a:t>
+                  <a:srgbClr val="BAC2DE"/>
+                </a:solidFill>
+                <a:latin typeface="Consolas"/>
+              </a:rPr>
+              <a:t>)</a:t>
+            </a:r>
+            <a:r>
+              <a:rPr sz="1600">
+                <a:solidFill>
+                  <a:srgbClr val="BAC2DE"/>
+                </a:solidFill>
+                <a:latin typeface="Consolas"/>
+              </a:rPr>
+              <a:t>,</a:t>
             </a:r>
           </a:p>
           <a:p>
@@ -5922,47 +7141,74 @@
             <a:r>
               <a:rPr sz="1600">
                 <a:solidFill>
-                  <a:srgbClr val="DCDCDC"/>
-                </a:solidFill>
-                <a:latin typeface="Consolas"/>
-              </a:rPr>
-              <a:t>        (</a:t>
-            </a:r>
-            <a:r>
-              <a:rPr sz="1600">
-                <a:solidFill>
-                  <a:srgbClr val="B5CEA8"/>
-                </a:solidFill>
-                <a:latin typeface="Consolas"/>
-              </a:rPr>
-              <a:t>90</a:t>
-            </a:r>
-            <a:r>
-              <a:rPr sz="1600">
-                <a:solidFill>
-                  <a:srgbClr val="DCDCDC"/>
-                </a:solidFill>
-                <a:latin typeface="Consolas"/>
-              </a:rPr>
-              <a:t>, </a:t>
-            </a:r>
-            <a:r>
-              <a:rPr sz="1600">
-                <a:solidFill>
-                  <a:srgbClr val="B5CEA8"/>
-                </a:solidFill>
-                <a:latin typeface="Consolas"/>
-              </a:rPr>
-              <a:t>100</a:t>
-            </a:r>
-            <a:r>
-              <a:rPr sz="1600">
-                <a:solidFill>
-                  <a:srgbClr val="DCDCDC"/>
-                </a:solidFill>
-                <a:latin typeface="Consolas"/>
-              </a:rPr>
-              <a:t>),</a:t>
+                  <a:srgbClr val="EEFFFF"/>
+                </a:solidFill>
+                <a:latin typeface="Consolas"/>
+              </a:rPr>
+              <a:t>        </a:t>
+            </a:r>
+            <a:r>
+              <a:rPr sz="1600">
+                <a:solidFill>
+                  <a:srgbClr val="BAC2DE"/>
+                </a:solidFill>
+                <a:latin typeface="Consolas"/>
+              </a:rPr>
+              <a:t>(</a:t>
+            </a:r>
+            <a:r>
+              <a:rPr sz="1600">
+                <a:solidFill>
+                  <a:srgbClr val="F78C6C"/>
+                </a:solidFill>
+                <a:latin typeface="Consolas"/>
+              </a:rPr>
+              <a:t>180</a:t>
+            </a:r>
+            <a:r>
+              <a:rPr sz="1600">
+                <a:solidFill>
+                  <a:srgbClr val="BAC2DE"/>
+                </a:solidFill>
+                <a:latin typeface="Consolas"/>
+              </a:rPr>
+              <a:t>,</a:t>
+            </a:r>
+            <a:r>
+              <a:rPr sz="1600">
+                <a:solidFill>
+                  <a:srgbClr val="EEFFFF"/>
+                </a:solidFill>
+                <a:latin typeface="Consolas"/>
+              </a:rPr>
+              <a:t> </a:t>
+            </a:r>
+            <a:r>
+              <a:rPr sz="1600">
+                <a:solidFill>
+                  <a:srgbClr val="F78C6C"/>
+                </a:solidFill>
+                <a:latin typeface="Consolas"/>
+              </a:rPr>
+              <a:t>120</a:t>
+            </a:r>
+            <a:r>
+              <a:rPr sz="1600">
+                <a:solidFill>
+                  <a:srgbClr val="BAC2DE"/>
+                </a:solidFill>
+                <a:latin typeface="Consolas"/>
+              </a:rPr>
+              <a:t>)</a:t>
+            </a:r>
+            <a:r>
+              <a:rPr sz="1600">
+                <a:solidFill>
+                  <a:srgbClr val="BAC2DE"/>
+                </a:solidFill>
+                <a:latin typeface="Consolas"/>
+              </a:rPr>
+              <a:t>,</a:t>
             </a:r>
           </a:p>
           <a:p>
@@ -5980,34 +7226,52 @@
             <a:r>
               <a:rPr sz="1600">
                 <a:solidFill>
-                  <a:srgbClr val="DCDCDC"/>
-                </a:solidFill>
-                <a:latin typeface="Consolas"/>
-              </a:rPr>
-              <a:t>        (</a:t>
-            </a:r>
-            <a:r>
-              <a:rPr sz="1600">
-                <a:solidFill>
-                  <a:srgbClr val="B5CEA8"/>
-                </a:solidFill>
-                <a:latin typeface="Consolas"/>
-              </a:rPr>
-              <a:t>45</a:t>
-            </a:r>
-            <a:r>
-              <a:rPr sz="1600">
-                <a:solidFill>
-                  <a:srgbClr val="DCDCDC"/>
-                </a:solidFill>
-                <a:latin typeface="Consolas"/>
-              </a:rPr>
-              <a:t>, </a:t>
-            </a:r>
-            <a:r>
-              <a:rPr sz="1600">
-                <a:solidFill>
-                  <a:srgbClr val="B5CEA8"/>
+                  <a:srgbClr val="EEFFFF"/>
+                </a:solidFill>
+                <a:latin typeface="Consolas"/>
+              </a:rPr>
+              <a:t>        </a:t>
+            </a:r>
+            <a:r>
+              <a:rPr sz="1600">
+                <a:solidFill>
+                  <a:srgbClr val="BAC2DE"/>
+                </a:solidFill>
+                <a:latin typeface="Consolas"/>
+              </a:rPr>
+              <a:t>(</a:t>
+            </a:r>
+            <a:r>
+              <a:rPr sz="1600">
+                <a:solidFill>
+                  <a:srgbClr val="F78C6C"/>
+                </a:solidFill>
+                <a:latin typeface="Consolas"/>
+              </a:rPr>
+              <a:t>135</a:t>
+            </a:r>
+            <a:r>
+              <a:rPr sz="1600">
+                <a:solidFill>
+                  <a:srgbClr val="BAC2DE"/>
+                </a:solidFill>
+                <a:latin typeface="Consolas"/>
+              </a:rPr>
+              <a:t>,</a:t>
+            </a:r>
+            <a:r>
+              <a:rPr sz="1600">
+                <a:solidFill>
+                  <a:srgbClr val="EEFFFF"/>
+                </a:solidFill>
+                <a:latin typeface="Consolas"/>
+              </a:rPr>
+              <a:t> </a:t>
+            </a:r>
+            <a:r>
+              <a:rPr sz="1600">
+                <a:solidFill>
+                  <a:srgbClr val="F78C6C"/>
                 </a:solidFill>
                 <a:latin typeface="Consolas"/>
               </a:rPr>
@@ -6016,11 +7280,20 @@
             <a:r>
               <a:rPr sz="1600">
                 <a:solidFill>
-                  <a:srgbClr val="DCDCDC"/>
-                </a:solidFill>
-                <a:latin typeface="Consolas"/>
-              </a:rPr>
-              <a:t>),</a:t>
+                  <a:srgbClr val="BAC2DE"/>
+                </a:solidFill>
+                <a:latin typeface="Consolas"/>
+              </a:rPr>
+              <a:t>)</a:t>
+            </a:r>
+            <a:r>
+              <a:rPr sz="1600">
+                <a:solidFill>
+                  <a:srgbClr val="BAC2DE"/>
+                </a:solidFill>
+                <a:latin typeface="Consolas"/>
+              </a:rPr>
+              <a:t>,</a:t>
             </a:r>
           </a:p>
           <a:p>
@@ -6038,47 +7311,74 @@
             <a:r>
               <a:rPr sz="1600">
                 <a:solidFill>
-                  <a:srgbClr val="DCDCDC"/>
-                </a:solidFill>
-                <a:latin typeface="Consolas"/>
-              </a:rPr>
-              <a:t>        (</a:t>
-            </a:r>
-            <a:r>
-              <a:rPr sz="1600">
-                <a:solidFill>
-                  <a:srgbClr val="B5CEA8"/>
-                </a:solidFill>
-                <a:latin typeface="Consolas"/>
-              </a:rPr>
-              <a:t>0</a:t>
-            </a:r>
-            <a:r>
-              <a:rPr sz="1600">
-                <a:solidFill>
-                  <a:srgbClr val="DCDCDC"/>
-                </a:solidFill>
-                <a:latin typeface="Consolas"/>
-              </a:rPr>
-              <a:t>, </a:t>
-            </a:r>
-            <a:r>
-              <a:rPr sz="1600">
-                <a:solidFill>
-                  <a:srgbClr val="B5CEA8"/>
-                </a:solidFill>
-                <a:latin typeface="Consolas"/>
-              </a:rPr>
-              <a:t>120</a:t>
-            </a:r>
-            <a:r>
-              <a:rPr sz="1600">
-                <a:solidFill>
-                  <a:srgbClr val="DCDCDC"/>
-                </a:solidFill>
-                <a:latin typeface="Consolas"/>
-              </a:rPr>
-              <a:t>),</a:t>
+                  <a:srgbClr val="EEFFFF"/>
+                </a:solidFill>
+                <a:latin typeface="Consolas"/>
+              </a:rPr>
+              <a:t>        </a:t>
+            </a:r>
+            <a:r>
+              <a:rPr sz="1600">
+                <a:solidFill>
+                  <a:srgbClr val="BAC2DE"/>
+                </a:solidFill>
+                <a:latin typeface="Consolas"/>
+              </a:rPr>
+              <a:t>(</a:t>
+            </a:r>
+            <a:r>
+              <a:rPr sz="1600">
+                <a:solidFill>
+                  <a:srgbClr val="F78C6C"/>
+                </a:solidFill>
+                <a:latin typeface="Consolas"/>
+              </a:rPr>
+              <a:t>90</a:t>
+            </a:r>
+            <a:r>
+              <a:rPr sz="1600">
+                <a:solidFill>
+                  <a:srgbClr val="BAC2DE"/>
+                </a:solidFill>
+                <a:latin typeface="Consolas"/>
+              </a:rPr>
+              <a:t>,</a:t>
+            </a:r>
+            <a:r>
+              <a:rPr sz="1600">
+                <a:solidFill>
+                  <a:srgbClr val="EEFFFF"/>
+                </a:solidFill>
+                <a:latin typeface="Consolas"/>
+              </a:rPr>
+              <a:t> </a:t>
+            </a:r>
+            <a:r>
+              <a:rPr sz="1600">
+                <a:solidFill>
+                  <a:srgbClr val="F78C6C"/>
+                </a:solidFill>
+                <a:latin typeface="Consolas"/>
+              </a:rPr>
+              <a:t>100</a:t>
+            </a:r>
+            <a:r>
+              <a:rPr sz="1600">
+                <a:solidFill>
+                  <a:srgbClr val="BAC2DE"/>
+                </a:solidFill>
+                <a:latin typeface="Consolas"/>
+              </a:rPr>
+              <a:t>)</a:t>
+            </a:r>
+            <a:r>
+              <a:rPr sz="1600">
+                <a:solidFill>
+                  <a:srgbClr val="BAC2DE"/>
+                </a:solidFill>
+                <a:latin typeface="Consolas"/>
+              </a:rPr>
+              <a:t>,</a:t>
             </a:r>
           </a:p>
           <a:p>
@@ -6096,11 +7396,74 @@
             <a:r>
               <a:rPr sz="1600">
                 <a:solidFill>
-                  <a:srgbClr val="DCDCDC"/>
-                </a:solidFill>
-                <a:latin typeface="Consolas"/>
-              </a:rPr>
-              <a:t>    ]);</a:t>
+                  <a:srgbClr val="EEFFFF"/>
+                </a:solidFill>
+                <a:latin typeface="Consolas"/>
+              </a:rPr>
+              <a:t>        </a:t>
+            </a:r>
+            <a:r>
+              <a:rPr sz="1600">
+                <a:solidFill>
+                  <a:srgbClr val="BAC2DE"/>
+                </a:solidFill>
+                <a:latin typeface="Consolas"/>
+              </a:rPr>
+              <a:t>(</a:t>
+            </a:r>
+            <a:r>
+              <a:rPr sz="1600">
+                <a:solidFill>
+                  <a:srgbClr val="F78C6C"/>
+                </a:solidFill>
+                <a:latin typeface="Consolas"/>
+              </a:rPr>
+              <a:t>45</a:t>
+            </a:r>
+            <a:r>
+              <a:rPr sz="1600">
+                <a:solidFill>
+                  <a:srgbClr val="BAC2DE"/>
+                </a:solidFill>
+                <a:latin typeface="Consolas"/>
+              </a:rPr>
+              <a:t>,</a:t>
+            </a:r>
+            <a:r>
+              <a:rPr sz="1600">
+                <a:solidFill>
+                  <a:srgbClr val="EEFFFF"/>
+                </a:solidFill>
+                <a:latin typeface="Consolas"/>
+              </a:rPr>
+              <a:t> </a:t>
+            </a:r>
+            <a:r>
+              <a:rPr sz="1600">
+                <a:solidFill>
+                  <a:srgbClr val="F78C6C"/>
+                </a:solidFill>
+                <a:latin typeface="Consolas"/>
+              </a:rPr>
+              <a:t>100</a:t>
+            </a:r>
+            <a:r>
+              <a:rPr sz="1600">
+                <a:solidFill>
+                  <a:srgbClr val="BAC2DE"/>
+                </a:solidFill>
+                <a:latin typeface="Consolas"/>
+              </a:rPr>
+              <a:t>)</a:t>
+            </a:r>
+            <a:r>
+              <a:rPr sz="1600">
+                <a:solidFill>
+                  <a:srgbClr val="BAC2DE"/>
+                </a:solidFill>
+                <a:latin typeface="Consolas"/>
+              </a:rPr>
+              <a:t>,</a:t>
             </a:r>
           </a:p>
           <a:p>
@@ -6118,11 +7481,74 @@
             <a:r>
               <a:rPr sz="1600">
                 <a:solidFill>
-                  <a:srgbClr val="DCDCDC"/>
-                </a:solidFill>
-                <a:latin typeface="Consolas"/>
-              </a:rPr>
-              <a:t>}</a:t>
+                  <a:srgbClr val="EEFFFF"/>
+                </a:solidFill>
+                <a:latin typeface="Consolas"/>
+              </a:rPr>
+              <a:t>        </a:t>
+            </a:r>
+            <a:r>
+              <a:rPr sz="1600">
+                <a:solidFill>
+                  <a:srgbClr val="BAC2DE"/>
+                </a:solidFill>
+                <a:latin typeface="Consolas"/>
+              </a:rPr>
+              <a:t>(</a:t>
+            </a:r>
+            <a:r>
+              <a:rPr sz="1600">
+                <a:solidFill>
+                  <a:srgbClr val="F78C6C"/>
+                </a:solidFill>
+                <a:latin typeface="Consolas"/>
+              </a:rPr>
+              <a:t>0</a:t>
+            </a:r>
+            <a:r>
+              <a:rPr sz="1600">
+                <a:solidFill>
+                  <a:srgbClr val="BAC2DE"/>
+                </a:solidFill>
+                <a:latin typeface="Consolas"/>
+              </a:rPr>
+              <a:t>,</a:t>
+            </a:r>
+            <a:r>
+              <a:rPr sz="1600">
+                <a:solidFill>
+                  <a:srgbClr val="EEFFFF"/>
+                </a:solidFill>
+                <a:latin typeface="Consolas"/>
+              </a:rPr>
+              <a:t> </a:t>
+            </a:r>
+            <a:r>
+              <a:rPr sz="1600">
+                <a:solidFill>
+                  <a:srgbClr val="F78C6C"/>
+                </a:solidFill>
+                <a:latin typeface="Consolas"/>
+              </a:rPr>
+              <a:t>120</a:t>
+            </a:r>
+            <a:r>
+              <a:rPr sz="1600">
+                <a:solidFill>
+                  <a:srgbClr val="BAC2DE"/>
+                </a:solidFill>
+                <a:latin typeface="Consolas"/>
+              </a:rPr>
+              <a:t>)</a:t>
+            </a:r>
+            <a:r>
+              <a:rPr sz="1600">
+                <a:solidFill>
+                  <a:srgbClr val="BAC2DE"/>
+                </a:solidFill>
+                <a:latin typeface="Consolas"/>
+              </a:rPr>
+              <a:t>,</a:t>
             </a:r>
           </a:p>
           <a:p>
@@ -6137,12 +7563,42 @@
                 <a:spcPts val="0"/>
               </a:spcAft>
             </a:pPr>
-            <a:endParaRPr sz="1600">
-              <a:solidFill>
-                <a:srgbClr val="DCDCDC"/>
-              </a:solidFill>
-              <a:latin typeface="Consolas"/>
-            </a:endParaRPr>
+            <a:r>
+              <a:rPr sz="1600">
+                <a:solidFill>
+                  <a:srgbClr val="EEFFFF"/>
+                </a:solidFill>
+                <a:latin typeface="Consolas"/>
+              </a:rPr>
+              <a:t>    </a:t>
+            </a:r>
+            <a:r>
+              <a:rPr sz="1600">
+                <a:solidFill>
+                  <a:srgbClr val="BAC2DE"/>
+                </a:solidFill>
+                <a:latin typeface="Consolas"/>
+              </a:rPr>
+              <a:t>]</a:t>
+            </a:r>
+            <a:r>
+              <a:rPr sz="1600">
+                <a:solidFill>
+                  <a:srgbClr val="BAC2DE"/>
+                </a:solidFill>
+                <a:latin typeface="Consolas"/>
+              </a:rPr>
+              <a:t>)</a:t>
+            </a:r>
+            <a:r>
+              <a:rPr sz="1600">
+                <a:solidFill>
+                  <a:srgbClr val="BAC2DE"/>
+                </a:solidFill>
+                <a:latin typeface="Consolas"/>
+              </a:rPr>
+              <a:t>;</a:t>
+            </a:r>
           </a:p>
           <a:p>
             <a:pPr>
@@ -6159,38 +7615,11 @@
             <a:r>
               <a:rPr sz="1600">
                 <a:solidFill>
-                  <a:srgbClr val="C586C0"/>
-                </a:solidFill>
-                <a:latin typeface="Consolas"/>
-              </a:rPr>
-              <a:t>fn</a:t>
-            </a:r>
-            <a:r>
-              <a:rPr sz="1600">
-                <a:solidFill>
-                  <a:srgbClr val="DCDCDC"/>
-                </a:solidFill>
-                <a:latin typeface="Consolas"/>
-              </a:rPr>
-              <a:t> </a:t>
-            </a:r>
-            <a:r>
-              <a:rPr sz="1600">
-                <a:solidFill>
-                  <a:srgbClr val="DCDCAA"/>
-                </a:solidFill>
-                <a:latin typeface="Consolas"/>
-              </a:rPr>
-              <a:t>main</a:t>
-            </a:r>
-            <a:r>
-              <a:rPr sz="1600">
-                <a:solidFill>
-                  <a:srgbClr val="DCDCDC"/>
-                </a:solidFill>
-                <a:latin typeface="Consolas"/>
-              </a:rPr>
-              <a:t>() {</a:t>
+                  <a:srgbClr val="BAC2DE"/>
+                </a:solidFill>
+                <a:latin typeface="Consolas"/>
+              </a:rPr>
+              <a:t>}</a:t>
             </a:r>
           </a:p>
           <a:p>
@@ -6205,33 +7634,6 @@
                 <a:spcPts val="0"/>
               </a:spcAft>
             </a:pPr>
-            <a:r>
-              <a:rPr sz="1600">
-                <a:solidFill>
-                  <a:srgbClr val="DCDCDC"/>
-                </a:solidFill>
-                <a:latin typeface="Consolas"/>
-              </a:rPr>
-              <a:t>    </a:t>
-            </a:r>
-            <a:r>
-              <a:rPr sz="1600">
-                <a:solidFill>
-                  <a:srgbClr val="C586C0"/>
-                </a:solidFill>
-                <a:latin typeface="Consolas"/>
-              </a:rPr>
-              <a:t>let</a:t>
-            </a:r>
-            <a:r>
-              <a:rPr sz="1600">
-                <a:solidFill>
-                  <a:srgbClr val="DCDCDC"/>
-                </a:solidFill>
-                <a:latin typeface="Consolas"/>
-              </a:rPr>
-              <a:t> servo = ServoEsp;</a:t>
-            </a:r>
           </a:p>
           <a:p>
             <a:pPr>
@@ -6248,29 +7650,65 @@
             <a:r>
               <a:rPr sz="1600">
                 <a:solidFill>
-                  <a:srgbClr val="DCDCDC"/>
-                </a:solidFill>
-                <a:latin typeface="Consolas"/>
-              </a:rPr>
-              <a:t>    </a:t>
-            </a:r>
-            <a:r>
-              <a:rPr sz="1600">
-                <a:solidFill>
-                  <a:srgbClr val="C586C0"/>
-                </a:solidFill>
-                <a:latin typeface="Consolas"/>
-              </a:rPr>
-              <a:t>let</a:t>
-            </a:r>
-            <a:r>
-              <a:rPr sz="1600">
-                <a:solidFill>
-                  <a:srgbClr val="DCDCDC"/>
-                </a:solidFill>
-                <a:latin typeface="Consolas"/>
-              </a:rPr>
-              <a:t> servo_player = ServoPlayerEsp;</a:t>
+                  <a:srgbClr val="C792EA"/>
+                </a:solidFill>
+                <a:latin typeface="Consolas"/>
+              </a:rPr>
+              <a:t>fn</a:t>
+            </a:r>
+            <a:r>
+              <a:rPr sz="1600">
+                <a:solidFill>
+                  <a:srgbClr val="EEFFFF"/>
+                </a:solidFill>
+                <a:latin typeface="Consolas"/>
+              </a:rPr>
+              <a:t> </a:t>
+            </a:r>
+            <a:r>
+              <a:rPr sz="1600">
+                <a:solidFill>
+                  <a:srgbClr val="82AAFF"/>
+                </a:solidFill>
+                <a:latin typeface="Consolas"/>
+              </a:rPr>
+              <a:t>main</a:t>
+            </a:r>
+            <a:r>
+              <a:rPr sz="1600">
+                <a:solidFill>
+                  <a:srgbClr val="BAC2DE"/>
+                </a:solidFill>
+                <a:latin typeface="Consolas"/>
+              </a:rPr>
+              <a:t>(</a:t>
+            </a:r>
+            <a:r>
+              <a:rPr sz="1600">
+                <a:solidFill>
+                  <a:srgbClr val="BAC2DE"/>
+                </a:solidFill>
+                <a:latin typeface="Consolas"/>
+              </a:rPr>
+              <a:t>)</a:t>
+            </a:r>
+            <a:r>
+              <a:rPr sz="1600">
+                <a:solidFill>
+                  <a:srgbClr val="EEFFFF"/>
+                </a:solidFill>
+                <a:latin typeface="Consolas"/>
+              </a:rPr>
+              <a:t> </a:t>
+            </a:r>
+            <a:r>
+              <a:rPr sz="1600">
+                <a:solidFill>
+                  <a:srgbClr val="BAC2DE"/>
+                </a:solidFill>
+                <a:latin typeface="Consolas"/>
+              </a:rPr>
+              <a:t>{</a:t>
             </a:r>
           </a:p>
           <a:p>
@@ -6285,12 +7723,87 @@
                 <a:spcPts val="0"/>
               </a:spcAft>
             </a:pPr>
-            <a:endParaRPr sz="1600">
-              <a:solidFill>
-                <a:srgbClr val="DCDCDC"/>
-              </a:solidFill>
-              <a:latin typeface="Consolas"/>
-            </a:endParaRPr>
+            <a:r>
+              <a:rPr sz="1600">
+                <a:solidFill>
+                  <a:srgbClr val="EEFFFF"/>
+                </a:solidFill>
+                <a:latin typeface="Consolas"/>
+              </a:rPr>
+              <a:t>    </a:t>
+            </a:r>
+            <a:r>
+              <a:rPr sz="1600">
+                <a:solidFill>
+                  <a:srgbClr val="C792EA"/>
+                </a:solidFill>
+                <a:latin typeface="Consolas"/>
+              </a:rPr>
+              <a:t>let</a:t>
+            </a:r>
+            <a:r>
+              <a:rPr sz="1600">
+                <a:solidFill>
+                  <a:srgbClr val="EEFFFF"/>
+                </a:solidFill>
+                <a:latin typeface="Consolas"/>
+              </a:rPr>
+              <a:t> </a:t>
+            </a:r>
+            <a:r>
+              <a:rPr sz="1600">
+                <a:solidFill>
+                  <a:srgbClr val="EEFFFF"/>
+                </a:solidFill>
+                <a:latin typeface="Consolas"/>
+              </a:rPr>
+              <a:t>servo</a:t>
+            </a:r>
+            <a:r>
+              <a:rPr sz="1600">
+                <a:solidFill>
+                  <a:srgbClr val="EEFFFF"/>
+                </a:solidFill>
+                <a:latin typeface="Consolas"/>
+              </a:rPr>
+              <a:t> </a:t>
+            </a:r>
+            <a:r>
+              <a:rPr sz="1600">
+                <a:solidFill>
+                  <a:srgbClr val="89DDFF"/>
+                </a:solidFill>
+                <a:latin typeface="Consolas"/>
+              </a:rPr>
+              <a:t>=</a:t>
+            </a:r>
+            <a:r>
+              <a:rPr sz="1600">
+                <a:solidFill>
+                  <a:srgbClr val="EEFFFF"/>
+                </a:solidFill>
+                <a:latin typeface="Consolas"/>
+              </a:rPr>
+              <a:t> </a:t>
+            </a:r>
+            <a:r>
+              <a:rPr sz="1600">
+                <a:solidFill>
+                  <a:srgbClr val="EEFFFF"/>
+                </a:solidFill>
+                <a:latin typeface="Consolas"/>
+              </a:rPr>
+              <a:t>ServoEsp</a:t>
+            </a:r>
+            <a:r>
+              <a:rPr sz="1600">
+                <a:solidFill>
+                  <a:srgbClr val="BAC2DE"/>
+                </a:solidFill>
+                <a:latin typeface="Consolas"/>
+              </a:rPr>
+              <a:t>;</a:t>
+            </a:r>
           </a:p>
           <a:p>
             <a:pPr>
@@ -6307,11 +7820,83 @@
             <a:r>
               <a:rPr sz="1600">
                 <a:solidFill>
-                  <a:srgbClr val="DCDCDC"/>
-                </a:solidFill>
-                <a:latin typeface="Consolas"/>
-              </a:rPr>
-              <a:t>    center_servo(&amp;servo);</a:t>
+                  <a:srgbClr val="EEFFFF"/>
+                </a:solidFill>
+                <a:latin typeface="Consolas"/>
+              </a:rPr>
+              <a:t>    </a:t>
+            </a:r>
+            <a:r>
+              <a:rPr sz="1600">
+                <a:solidFill>
+                  <a:srgbClr val="C792EA"/>
+                </a:solidFill>
+                <a:latin typeface="Consolas"/>
+              </a:rPr>
+              <a:t>let</a:t>
+            </a:r>
+            <a:r>
+              <a:rPr sz="1600">
+                <a:solidFill>
+                  <a:srgbClr val="EEFFFF"/>
+                </a:solidFill>
+                <a:latin typeface="Consolas"/>
+              </a:rPr>
+              <a:t> </a:t>
+            </a:r>
+            <a:r>
+              <a:rPr sz="1600">
+                <a:solidFill>
+                  <a:srgbClr val="EEFFFF"/>
+                </a:solidFill>
+                <a:latin typeface="Consolas"/>
+              </a:rPr>
+              <a:t>servo_player</a:t>
+            </a:r>
+            <a:r>
+              <a:rPr sz="1600">
+                <a:solidFill>
+                  <a:srgbClr val="EEFFFF"/>
+                </a:solidFill>
+                <a:latin typeface="Consolas"/>
+              </a:rPr>
+              <a:t> </a:t>
+            </a:r>
+            <a:r>
+              <a:rPr sz="1600">
+                <a:solidFill>
+                  <a:srgbClr val="89DDFF"/>
+                </a:solidFill>
+                <a:latin typeface="Consolas"/>
+              </a:rPr>
+              <a:t>=</a:t>
+            </a:r>
+            <a:r>
+              <a:rPr sz="1600">
+                <a:solidFill>
+                  <a:srgbClr val="EEFFFF"/>
+                </a:solidFill>
+                <a:latin typeface="Consolas"/>
+              </a:rPr>
+              <a:t> </a:t>
+            </a:r>
+            <a:r>
+              <a:rPr sz="1600">
+                <a:solidFill>
+                  <a:srgbClr val="EEFFFF"/>
+                </a:solidFill>
+                <a:latin typeface="Consolas"/>
+              </a:rPr>
+              <a:t>ServoPlayerEsp</a:t>
+            </a:r>
+            <a:r>
+              <a:rPr sz="1600">
+                <a:solidFill>
+                  <a:srgbClr val="BAC2DE"/>
+                </a:solidFill>
+                <a:latin typeface="Consolas"/>
+              </a:rPr>
+              <a:t>;</a:t>
             </a:r>
           </a:p>
           <a:p>
@@ -6326,24 +7911,6 @@
                 <a:spcPts val="0"/>
               </a:spcAft>
             </a:pPr>
-            <a:r>
-              <a:rPr sz="1600">
-                <a:solidFill>
-                  <a:srgbClr val="DCDCDC"/>
-                </a:solidFill>
-                <a:latin typeface="Consolas"/>
-              </a:rPr>
-              <a:t>    center_servo(&amp;servo_player); </a:t>
-            </a:r>
-            <a:r>
-              <a:rPr sz="1600">
-                <a:solidFill>
-                  <a:srgbClr val="6A9955"/>
-                </a:solidFill>
-                <a:latin typeface="Consolas"/>
-              </a:rPr>
-              <a:t>// `ServoPlayer` can do everything `Servo` can!</a:t>
-            </a:r>
           </a:p>
           <a:p>
             <a:pPr>
@@ -6360,11 +7927,65 @@
             <a:r>
               <a:rPr sz="1600">
                 <a:solidFill>
-                  <a:srgbClr val="DCDCDC"/>
-                </a:solidFill>
-                <a:latin typeface="Consolas"/>
-              </a:rPr>
-              <a:t>    run_wave(&amp;servo_player);</a:t>
+                  <a:srgbClr val="EEFFFF"/>
+                </a:solidFill>
+                <a:latin typeface="Consolas"/>
+              </a:rPr>
+              <a:t>    </a:t>
+            </a:r>
+            <a:r>
+              <a:rPr sz="1600">
+                <a:solidFill>
+                  <a:srgbClr val="EEFFFF"/>
+                </a:solidFill>
+                <a:latin typeface="Consolas"/>
+              </a:rPr>
+              <a:t>center_servo</a:t>
+            </a:r>
+            <a:r>
+              <a:rPr sz="1600">
+                <a:solidFill>
+                  <a:srgbClr val="BAC2DE"/>
+                </a:solidFill>
+                <a:latin typeface="Consolas"/>
+              </a:rPr>
+              <a:t>(</a:t>
+            </a:r>
+            <a:r>
+              <a:rPr sz="1600">
+                <a:solidFill>
+                  <a:srgbClr val="89DDFF"/>
+                </a:solidFill>
+                <a:latin typeface="Consolas"/>
+              </a:rPr>
+              <a:t>&amp;</a:t>
+            </a:r>
+            <a:r>
+              <a:rPr sz="1600">
+                <a:solidFill>
+                  <a:srgbClr val="EEFFFF"/>
+                </a:solidFill>
+                <a:latin typeface="Consolas"/>
+              </a:rPr>
+              <a:t>servo</a:t>
+            </a:r>
+            <a:r>
+              <a:rPr sz="1600">
+                <a:solidFill>
+                  <a:srgbClr val="BAC2DE"/>
+                </a:solidFill>
+                <a:latin typeface="Consolas"/>
+              </a:rPr>
+              <a:t>)</a:t>
+            </a:r>
+            <a:r>
+              <a:rPr sz="1600">
+                <a:solidFill>
+                  <a:srgbClr val="BAC2DE"/>
+                </a:solidFill>
+                <a:latin typeface="Consolas"/>
+              </a:rPr>
+              <a:t>;</a:t>
             </a:r>
           </a:p>
           <a:p>
@@ -6382,7 +8003,221 @@
             <a:r>
               <a:rPr sz="1600">
                 <a:solidFill>
-                  <a:srgbClr val="DCDCDC"/>
+                  <a:srgbClr val="EEFFFF"/>
+                </a:solidFill>
+                <a:latin typeface="Consolas"/>
+              </a:rPr>
+              <a:t>    </a:t>
+            </a:r>
+            <a:r>
+              <a:rPr sz="1600">
+                <a:solidFill>
+                  <a:srgbClr val="6A9955"/>
+                </a:solidFill>
+                <a:latin typeface="Consolas"/>
+              </a:rPr>
+              <a:t>// `ServoPlayer` can do everything `Servo` can!</a:t>
+            </a:r>
+          </a:p>
+          <a:p>
+            <a:pPr>
+              <a:lnSpc>
+                <a:spcPct val="95000"/>
+              </a:lnSpc>
+              <a:spcBef>
+                <a:spcPts val="0"/>
+              </a:spcBef>
+              <a:spcAft>
+                <a:spcPts val="0"/>
+              </a:spcAft>
+            </a:pPr>
+            <a:r>
+              <a:rPr sz="1600">
+                <a:solidFill>
+                  <a:srgbClr val="EEFFFF"/>
+                </a:solidFill>
+                <a:latin typeface="Consolas"/>
+              </a:rPr>
+              <a:t>    </a:t>
+            </a:r>
+            <a:r>
+              <a:rPr sz="1600">
+                <a:solidFill>
+                  <a:srgbClr val="EEFFFF"/>
+                </a:solidFill>
+                <a:latin typeface="Consolas"/>
+              </a:rPr>
+              <a:t>center_servo</a:t>
+            </a:r>
+            <a:r>
+              <a:rPr sz="1600">
+                <a:solidFill>
+                  <a:srgbClr val="BAC2DE"/>
+                </a:solidFill>
+                <a:latin typeface="Consolas"/>
+              </a:rPr>
+              <a:t>(</a:t>
+            </a:r>
+            <a:r>
+              <a:rPr sz="1600">
+                <a:solidFill>
+                  <a:srgbClr val="89DDFF"/>
+                </a:solidFill>
+                <a:latin typeface="Consolas"/>
+              </a:rPr>
+              <a:t>&amp;</a:t>
+            </a:r>
+            <a:r>
+              <a:rPr sz="1600">
+                <a:solidFill>
+                  <a:srgbClr val="EEFFFF"/>
+                </a:solidFill>
+                <a:latin typeface="Consolas"/>
+              </a:rPr>
+              <a:t>servo_player</a:t>
+            </a:r>
+            <a:r>
+              <a:rPr sz="1600">
+                <a:solidFill>
+                  <a:srgbClr val="BAC2DE"/>
+                </a:solidFill>
+                <a:latin typeface="Consolas"/>
+              </a:rPr>
+              <a:t>)</a:t>
+            </a:r>
+            <a:r>
+              <a:rPr sz="1600">
+                <a:solidFill>
+                  <a:srgbClr val="BAC2DE"/>
+                </a:solidFill>
+                <a:latin typeface="Consolas"/>
+              </a:rPr>
+              <a:t>;</a:t>
+            </a:r>
+          </a:p>
+          <a:p>
+            <a:pPr>
+              <a:lnSpc>
+                <a:spcPct val="95000"/>
+              </a:lnSpc>
+              <a:spcBef>
+                <a:spcPts val="0"/>
+              </a:spcBef>
+              <a:spcAft>
+                <a:spcPts val="0"/>
+              </a:spcAft>
+            </a:pPr>
+            <a:r>
+              <a:rPr sz="1600">
+                <a:solidFill>
+                  <a:srgbClr val="EEFFFF"/>
+                </a:solidFill>
+                <a:latin typeface="Consolas"/>
+              </a:rPr>
+              <a:t>    </a:t>
+            </a:r>
+            <a:r>
+              <a:rPr sz="1600">
+                <a:solidFill>
+                  <a:srgbClr val="6A9955"/>
+                </a:solidFill>
+                <a:latin typeface="Consolas"/>
+              </a:rPr>
+              <a:t>// and more.</a:t>
+            </a:r>
+          </a:p>
+          <a:p>
+            <a:pPr>
+              <a:lnSpc>
+                <a:spcPct val="95000"/>
+              </a:lnSpc>
+              <a:spcBef>
+                <a:spcPts val="0"/>
+              </a:spcBef>
+              <a:spcAft>
+                <a:spcPts val="0"/>
+              </a:spcAft>
+            </a:pPr>
+            <a:r>
+              <a:rPr sz="1600">
+                <a:solidFill>
+                  <a:srgbClr val="EEFFFF"/>
+                </a:solidFill>
+                <a:latin typeface="Consolas"/>
+              </a:rPr>
+              <a:t>    </a:t>
+            </a:r>
+            <a:r>
+              <a:rPr sz="1600">
+                <a:solidFill>
+                  <a:srgbClr val="EEFFFF"/>
+                </a:solidFill>
+                <a:latin typeface="Consolas"/>
+              </a:rPr>
+              <a:t>run_wave</a:t>
+            </a:r>
+            <a:r>
+              <a:rPr sz="1600">
+                <a:solidFill>
+                  <a:srgbClr val="BAC2DE"/>
+                </a:solidFill>
+                <a:latin typeface="Consolas"/>
+              </a:rPr>
+              <a:t>(</a:t>
+            </a:r>
+            <a:r>
+              <a:rPr sz="1600">
+                <a:solidFill>
+                  <a:srgbClr val="89DDFF"/>
+                </a:solidFill>
+                <a:latin typeface="Consolas"/>
+              </a:rPr>
+              <a:t>&amp;</a:t>
+            </a:r>
+            <a:r>
+              <a:rPr sz="1600">
+                <a:solidFill>
+                  <a:srgbClr val="EEFFFF"/>
+                </a:solidFill>
+                <a:latin typeface="Consolas"/>
+              </a:rPr>
+              <a:t>servo_player</a:t>
+            </a:r>
+            <a:r>
+              <a:rPr sz="1600">
+                <a:solidFill>
+                  <a:srgbClr val="BAC2DE"/>
+                </a:solidFill>
+                <a:latin typeface="Consolas"/>
+              </a:rPr>
+              <a:t>)</a:t>
+            </a:r>
+            <a:r>
+              <a:rPr sz="1600">
+                <a:solidFill>
+                  <a:srgbClr val="BAC2DE"/>
+                </a:solidFill>
+                <a:latin typeface="Consolas"/>
+              </a:rPr>
+              <a:t>;</a:t>
+            </a:r>
+          </a:p>
+          <a:p>
+            <a:pPr>
+              <a:lnSpc>
+                <a:spcPct val="95000"/>
+              </a:lnSpc>
+              <a:spcBef>
+                <a:spcPts val="0"/>
+              </a:spcBef>
+              <a:spcAft>
+                <a:spcPts val="0"/>
+              </a:spcAft>
+            </a:pPr>
+            <a:r>
+              <a:rPr sz="1600">
+                <a:solidFill>
+                  <a:srgbClr val="BAC2DE"/>
                 </a:solidFill>
                 <a:latin typeface="Consolas"/>
               </a:rPr>

--- a/docs/example2_walkthrough.pptx
+++ b/docs/example2_walkthrough.pptx
@@ -10,7 +10,7 @@
     <p:sldId id="258" r:id="rId9"/>
     <p:sldId id="259" r:id="rId10"/>
   </p:sldIdLst>
-  <p:sldSz cx="9144000" cy="6858000" type="screen4x3"/>
+  <p:sldSz cx="12192000" cy="6858000" type="screen4x3"/>
   <p:notesSz cx="6858000" cy="9144000"/>
   <p:defaultTextStyle>
     <a:defPPr>
@@ -3100,7 +3100,7 @@
         <p:spPr>
           <a:xfrm>
             <a:off x="0" y="0"/>
-            <a:ext cx="9144000" cy="6858000"/>
+            <a:ext cx="12192000" cy="6858000"/>
           </a:xfrm>
           <a:prstGeom prst="rect">
             <a:avLst/>
@@ -3142,7 +3142,7 @@
         </p:nvSpPr>
         <p:spPr>
           <a:xfrm>
-            <a:off x="7543800" y="0"/>
+            <a:off x="10591800" y="0"/>
             <a:ext cx="1600200" cy="6858000"/>
           </a:xfrm>
           <a:prstGeom prst="rect">
@@ -3187,7 +3187,7 @@
         </p:nvSpPr>
         <p:spPr>
           <a:xfrm rot="16200000">
-            <a:off x="7616952" y="274320"/>
+            <a:off x="10664952" y="274320"/>
             <a:ext cx="1453896" cy="6309360"/>
           </a:xfrm>
           <a:prstGeom prst="rect">
@@ -3224,7 +3224,7 @@
         <p:spPr>
           <a:xfrm>
             <a:off x="731520" y="502920"/>
-            <a:ext cx="6446520" cy="1051560"/>
+            <a:ext cx="9494520" cy="1051560"/>
           </a:xfrm>
           <a:prstGeom prst="rect">
             <a:avLst/>
@@ -3265,7 +3265,7 @@
         </p:blipFill>
         <p:spPr>
           <a:xfrm>
-            <a:off x="1436588" y="1691640"/>
+            <a:off x="2960588" y="1691640"/>
             <a:ext cx="4670622" cy="4846320"/>
           </a:xfrm>
           <a:prstGeom prst="rect">
@@ -3300,7 +3300,7 @@
         <p:spPr>
           <a:xfrm>
             <a:off x="0" y="0"/>
-            <a:ext cx="9144000" cy="6858000"/>
+            <a:ext cx="12192000" cy="6858000"/>
           </a:xfrm>
           <a:prstGeom prst="rect">
             <a:avLst/>
@@ -3343,7 +3343,7 @@
         <p:spPr>
           <a:xfrm>
             <a:off x="164592" y="109728"/>
-            <a:ext cx="8814816" cy="6638544"/>
+            <a:ext cx="11862816" cy="6638544"/>
           </a:xfrm>
           <a:prstGeom prst="rect">
             <a:avLst/>
@@ -4757,7 +4757,7 @@
         <p:spPr>
           <a:xfrm>
             <a:off x="0" y="0"/>
-            <a:ext cx="9144000" cy="6858000"/>
+            <a:ext cx="12192000" cy="6858000"/>
           </a:xfrm>
           <a:prstGeom prst="rect">
             <a:avLst/>
@@ -4800,7 +4800,7 @@
         <p:spPr>
           <a:xfrm>
             <a:off x="164592" y="109728"/>
-            <a:ext cx="8814816" cy="6638544"/>
+            <a:ext cx="11862816" cy="6638544"/>
           </a:xfrm>
           <a:prstGeom prst="rect">
             <a:avLst/>
@@ -6655,7 +6655,7 @@
         <p:spPr>
           <a:xfrm>
             <a:off x="0" y="0"/>
-            <a:ext cx="9144000" cy="6858000"/>
+            <a:ext cx="12192000" cy="6858000"/>
           </a:xfrm>
           <a:prstGeom prst="rect">
             <a:avLst/>
@@ -6698,7 +6698,7 @@
         <p:spPr>
           <a:xfrm>
             <a:off x="164592" y="109728"/>
-            <a:ext cx="8814816" cy="6638544"/>
+            <a:ext cx="11862816" cy="6638544"/>
           </a:xfrm>
           <a:prstGeom prst="rect">
             <a:avLst/>
